--- a/public/manuales/Capacitacion_Personal.pptx
+++ b/public/manuales/Capacitacion_Personal.pptx
@@ -14,8 +14,6 @@
     <p:sldId id="262" r:id="rId13"/>
     <p:sldId id="263" r:id="rId14"/>
     <p:sldId id="264" r:id="rId15"/>
-    <p:sldId id="265" r:id="rId16"/>
-    <p:sldId id="266" r:id="rId17"/>
   </p:sldIdLst>
   <p:sldSz cx="12191695" cy="6858000" type="screen4x3"/>
   <p:notesSz cx="6858000" cy="9144000"/>
@@ -3364,669 +3362,7 @@
                 </a:solidFill>
                 <a:latin typeface="Calibri"/>
               </a:rPr>
-              <a:t>Condominio Laguna Norte  ·  Junio 2026</a:t>
-            </a:r>
-          </a:p>
-        </p:txBody>
-      </p:sp>
-    </p:spTree>
-  </p:cSld>
-  <p:clrMapOvr>
-    <a:masterClrMapping/>
-  </p:clrMapOvr>
-</p:sld>
-</file>
-
-<file path=ppt/slides/slide10.xml><?xml version="1.0" encoding="utf-8"?>
-<p:sld xmlns:a="http://schemas.openxmlformats.org/drawingml/2006/main" xmlns:p="http://schemas.openxmlformats.org/presentationml/2006/main" xmlns:r="http://schemas.openxmlformats.org/officeDocument/2006/relationships">
-  <p:cSld>
-    <p:bg>
-      <p:bgPr>
-        <a:solidFill>
-          <a:srgbClr val="FFFFFF"/>
-        </a:solidFill>
-        <a:effectLst/>
-      </p:bgPr>
-    </p:bg>
-    <p:spTree>
-      <p:nvGrpSpPr>
-        <p:cNvPr id="1" name=""/>
-        <p:cNvGrpSpPr/>
-        <p:nvPr/>
-      </p:nvGrpSpPr>
-      <p:grpSpPr/>
-      <p:sp>
-        <p:nvSpPr>
-          <p:cNvPr id="2" name="Rectangle 1"/>
-          <p:cNvSpPr/>
-          <p:nvPr/>
-        </p:nvSpPr>
-        <p:spPr>
-          <a:xfrm>
-            <a:off x="0" y="0"/>
-            <a:ext cx="12191695" cy="822960"/>
-          </a:xfrm>
-          <a:prstGeom prst="rect">
-            <a:avLst/>
-          </a:prstGeom>
-          <a:solidFill>
-            <a:srgbClr val="0A1172"/>
-          </a:solidFill>
-          <a:ln>
-            <a:noFill/>
-          </a:ln>
-          <a:effectLst/>
-        </p:spPr>
-        <p:style>
-          <a:lnRef idx="1">
-            <a:schemeClr val="accent1"/>
-          </a:lnRef>
-          <a:fillRef idx="3">
-            <a:schemeClr val="accent1"/>
-          </a:fillRef>
-          <a:effectRef idx="2">
-            <a:schemeClr val="accent1"/>
-          </a:effectRef>
-          <a:fontRef idx="minor">
-            <a:schemeClr val="lt1"/>
-          </a:fontRef>
-        </p:style>
-        <p:txBody>
-          <a:bodyPr rtlCol="0" anchor="ctr"/>
-          <a:lstStyle/>
-          <a:p>
-            <a:pPr algn="ctr"/>
-          </a:p>
-        </p:txBody>
-      </p:sp>
-      <p:sp>
-        <p:nvSpPr>
-          <p:cNvPr id="3" name="TextBox 2"/>
-          <p:cNvSpPr txBox="1"/>
-          <p:nvPr/>
-        </p:nvSpPr>
-        <p:spPr>
-          <a:xfrm>
-            <a:off x="365760" y="137160"/>
-            <a:ext cx="10058400" cy="548640"/>
-          </a:xfrm>
-          <a:prstGeom prst="rect">
-            <a:avLst/>
-          </a:prstGeom>
-          <a:noFill/>
-        </p:spPr>
-        <p:txBody>
-          <a:bodyPr wrap="square" anchor="ctr" lIns="45720" rIns="45720">
-            <a:spAutoFit/>
-          </a:bodyPr>
-          <a:lstStyle/>
-          <a:p>
-            <a:pPr algn="l"/>
-            <a:r>
-              <a:rPr sz="2200" b="1">
-                <a:solidFill>
-                  <a:srgbClr val="FFFFFF"/>
-                </a:solidFill>
-                <a:latin typeface="Calibri"/>
-              </a:rPr>
-              <a:t>Datos de Acceso</a:t>
-            </a:r>
-          </a:p>
-        </p:txBody>
-      </p:sp>
-      <p:sp>
-        <p:nvSpPr>
-          <p:cNvPr id="4" name="TextBox 3"/>
-          <p:cNvSpPr txBox="1"/>
-          <p:nvPr/>
-        </p:nvSpPr>
-        <p:spPr>
-          <a:xfrm>
-            <a:off x="11247120" y="137160"/>
-            <a:ext cx="731520" cy="548640"/>
-          </a:xfrm>
-          <a:prstGeom prst="rect">
-            <a:avLst/>
-          </a:prstGeom>
-          <a:noFill/>
-        </p:spPr>
-        <p:txBody>
-          <a:bodyPr wrap="square" anchor="ctr" lIns="45720" rIns="45720">
-            <a:spAutoFit/>
-          </a:bodyPr>
-          <a:lstStyle/>
-          <a:p>
-            <a:pPr algn="r"/>
-            <a:r>
-              <a:rPr sz="1400" b="0">
-                <a:solidFill>
-                  <a:srgbClr val="F59E0B"/>
-                </a:solidFill>
-                <a:latin typeface="Calibri"/>
-              </a:rPr>
-              <a:t>10</a:t>
-            </a:r>
-          </a:p>
-        </p:txBody>
-      </p:sp>
-      <p:sp>
-        <p:nvSpPr>
-          <p:cNvPr id="5" name="TextBox 4"/>
-          <p:cNvSpPr txBox="1"/>
-          <p:nvPr/>
-        </p:nvSpPr>
-        <p:spPr>
-          <a:xfrm>
-            <a:off x="457200" y="1005840"/>
-            <a:ext cx="11247120" cy="731520"/>
-          </a:xfrm>
-          <a:prstGeom prst="rect">
-            <a:avLst/>
-          </a:prstGeom>
-          <a:noFill/>
-        </p:spPr>
-        <p:txBody>
-          <a:bodyPr wrap="square" anchor="t" lIns="45720" rIns="45720">
-            <a:spAutoFit/>
-          </a:bodyPr>
-          <a:lstStyle/>
-          <a:p>
-            <a:pPr algn="l"/>
-            <a:r>
-              <a:rPr sz="1400" b="0">
-                <a:solidFill>
-                  <a:srgbClr val="666666"/>
-                </a:solidFill>
-                <a:latin typeface="Calibri"/>
-              </a:rPr>
-              <a:t>Credenciales de prueba para capacitación:</a:t>
-            </a:r>
-          </a:p>
-        </p:txBody>
-      </p:sp>
-      <p:sp>
-        <p:nvSpPr>
-          <p:cNvPr id="6" name="TextBox 5"/>
-          <p:cNvSpPr txBox="1"/>
-          <p:nvPr/>
-        </p:nvSpPr>
-        <p:spPr>
-          <a:xfrm>
-            <a:off x="640080" y="1828800"/>
-            <a:ext cx="10972800" cy="4572000"/>
-          </a:xfrm>
-          <a:prstGeom prst="rect">
-            <a:avLst/>
-          </a:prstGeom>
-          <a:noFill/>
-        </p:spPr>
-        <p:txBody>
-          <a:bodyPr wrap="square">
-            <a:spAutoFit/>
-          </a:bodyPr>
-          <a:lstStyle/>
-          <a:p>
-            <a:pPr algn="l">
-              <a:lnSpc>
-                <a:spcPct val="140000"/>
-              </a:lnSpc>
-              <a:spcAft>
-                <a:spcPts val="800"/>
-              </a:spcAft>
-            </a:pPr>
-            <a:r>
-              <a:rPr sz="1600" b="1">
-                <a:solidFill>
-                  <a:srgbClr val="F59E0B"/>
-                </a:solidFill>
-                <a:latin typeface="Calibri"/>
-              </a:rPr>
-              <a:t>● </a:t>
-            </a:r>
-            <a:r>
-              <a:rPr sz="1600">
-                <a:solidFill>
-                  <a:srgbClr val="0F2040"/>
-                </a:solidFill>
-                <a:latin typeface="Calibri"/>
-              </a:rPr>
-              <a:t>URL: https://condominios-cyj.vercel.app</a:t>
-            </a:r>
-          </a:p>
-          <a:p>
-            <a:pPr algn="l">
-              <a:lnSpc>
-                <a:spcPct val="140000"/>
-              </a:lnSpc>
-              <a:spcAft>
-                <a:spcPts val="800"/>
-              </a:spcAft>
-            </a:pPr>
-            <a:r>
-              <a:rPr sz="1600" b="1">
-                <a:solidFill>
-                  <a:srgbClr val="F59E0B"/>
-                </a:solidFill>
-                <a:latin typeface="Calibri"/>
-              </a:rPr>
-              <a:t>● </a:t>
-            </a:r>
-            <a:r>
-              <a:rPr sz="1600">
-                <a:solidFill>
-                  <a:srgbClr val="0F2040"/>
-                </a:solidFill>
-                <a:latin typeface="Calibri"/>
-              </a:rPr>
-              <a:t>Email: personal.test@cyj.cl</a:t>
-            </a:r>
-          </a:p>
-          <a:p>
-            <a:pPr algn="l">
-              <a:lnSpc>
-                <a:spcPct val="140000"/>
-              </a:lnSpc>
-              <a:spcAft>
-                <a:spcPts val="800"/>
-              </a:spcAft>
-            </a:pPr>
-            <a:r>
-              <a:rPr sz="1600" b="1">
-                <a:solidFill>
-                  <a:srgbClr val="F59E0B"/>
-                </a:solidFill>
-                <a:latin typeface="Calibri"/>
-              </a:rPr>
-              <a:t>● </a:t>
-            </a:r>
-            <a:r>
-              <a:rPr sz="1600">
-                <a:solidFill>
-                  <a:srgbClr val="0F2040"/>
-                </a:solidFill>
-                <a:latin typeface="Calibri"/>
-              </a:rPr>
-              <a:t>Contraseña temporal: Personal2026!</a:t>
-            </a:r>
-          </a:p>
-          <a:p>
-            <a:pPr algn="l">
-              <a:lnSpc>
-                <a:spcPct val="140000"/>
-              </a:lnSpc>
-              <a:spcAft>
-                <a:spcPts val="800"/>
-              </a:spcAft>
-            </a:pPr>
-            <a:r>
-              <a:rPr sz="1600" b="1">
-                <a:solidFill>
-                  <a:srgbClr val="F59E0B"/>
-                </a:solidFill>
-                <a:latin typeface="Calibri"/>
-              </a:rPr>
-              <a:t>● </a:t>
-            </a:r>
-            <a:r>
-              <a:rPr sz="1600">
-                <a:solidFill>
-                  <a:srgbClr val="0F2040"/>
-                </a:solidFill>
-                <a:latin typeface="Calibri"/>
-              </a:rPr>
-              <a:t>Deberás cambiar la contraseña en el primer login</a:t>
-            </a:r>
-          </a:p>
-          <a:p>
-            <a:pPr algn="l">
-              <a:lnSpc>
-                <a:spcPct val="140000"/>
-              </a:lnSpc>
-              <a:spcAft>
-                <a:spcPts val="800"/>
-              </a:spcAft>
-            </a:pPr>
-            <a:r>
-              <a:rPr sz="1600" b="1">
-                <a:solidFill>
-                  <a:srgbClr val="F59E0B"/>
-                </a:solidFill>
-                <a:latin typeface="Calibri"/>
-              </a:rPr>
-              <a:t>● </a:t>
-            </a:r>
-            <a:r>
-              <a:rPr sz="1600">
-                <a:solidFill>
-                  <a:srgbClr val="0F2040"/>
-                </a:solidFill>
-                <a:latin typeface="Calibri"/>
-              </a:rPr>
-              <a:t>Página de inicio: /sistema (dashboard simplificado)</a:t>
-            </a:r>
-          </a:p>
-        </p:txBody>
-      </p:sp>
-      <p:sp>
-        <p:nvSpPr>
-          <p:cNvPr id="7" name="Rectangle 6"/>
-          <p:cNvSpPr/>
-          <p:nvPr/>
-        </p:nvSpPr>
-        <p:spPr>
-          <a:xfrm>
-            <a:off x="0" y="6583680"/>
-            <a:ext cx="12191695" cy="274320"/>
-          </a:xfrm>
-          <a:prstGeom prst="rect">
-            <a:avLst/>
-          </a:prstGeom>
-          <a:solidFill>
-            <a:srgbClr val="0F2040"/>
-          </a:solidFill>
-          <a:ln>
-            <a:noFill/>
-          </a:ln>
-          <a:effectLst/>
-        </p:spPr>
-        <p:style>
-          <a:lnRef idx="1">
-            <a:schemeClr val="accent1"/>
-          </a:lnRef>
-          <a:fillRef idx="3">
-            <a:schemeClr val="accent1"/>
-          </a:fillRef>
-          <a:effectRef idx="2">
-            <a:schemeClr val="accent1"/>
-          </a:effectRef>
-          <a:fontRef idx="minor">
-            <a:schemeClr val="lt1"/>
-          </a:fontRef>
-        </p:style>
-        <p:txBody>
-          <a:bodyPr rtlCol="0" anchor="ctr"/>
-          <a:lstStyle/>
-          <a:p>
-            <a:pPr algn="ctr"/>
-          </a:p>
-        </p:txBody>
-      </p:sp>
-      <p:sp>
-        <p:nvSpPr>
-          <p:cNvPr id="8" name="TextBox 7"/>
-          <p:cNvSpPr txBox="1"/>
-          <p:nvPr/>
-        </p:nvSpPr>
-        <p:spPr>
-          <a:xfrm>
-            <a:off x="365760" y="6583680"/>
-            <a:ext cx="6400800" cy="274320"/>
-          </a:xfrm>
-          <a:prstGeom prst="rect">
-            <a:avLst/>
-          </a:prstGeom>
-          <a:noFill/>
-        </p:spPr>
-        <p:txBody>
-          <a:bodyPr wrap="square" anchor="ctr" lIns="45720" rIns="45720">
-            <a:spAutoFit/>
-          </a:bodyPr>
-          <a:lstStyle/>
-          <a:p>
-            <a:pPr algn="l"/>
-            <a:r>
-              <a:rPr sz="900" b="0">
-                <a:solidFill>
-                  <a:srgbClr val="FFFFFF"/>
-                </a:solidFill>
-                <a:latin typeface="Calibri"/>
-              </a:rPr>
-              <a:t>Asesorías Integrales CyJ · Capacitación Personal</a:t>
-            </a:r>
-          </a:p>
-        </p:txBody>
-      </p:sp>
-      <p:sp>
-        <p:nvSpPr>
-          <p:cNvPr id="9" name="TextBox 8"/>
-          <p:cNvSpPr txBox="1"/>
-          <p:nvPr/>
-        </p:nvSpPr>
-        <p:spPr>
-          <a:xfrm>
-            <a:off x="7315200" y="6583680"/>
-            <a:ext cx="4572000" cy="274320"/>
-          </a:xfrm>
-          <a:prstGeom prst="rect">
-            <a:avLst/>
-          </a:prstGeom>
-          <a:noFill/>
-        </p:spPr>
-        <p:txBody>
-          <a:bodyPr wrap="square" anchor="ctr" lIns="45720" rIns="45720">
-            <a:spAutoFit/>
-          </a:bodyPr>
-          <a:lstStyle/>
-          <a:p>
-            <a:pPr algn="r"/>
-            <a:r>
-              <a:rPr sz="900" b="0">
-                <a:solidFill>
-                  <a:srgbClr val="F59E0B"/>
-                </a:solidFill>
-                <a:latin typeface="Calibri"/>
-              </a:rPr>
-              <a:t>https://condominios-cyj.vercel.app</a:t>
-            </a:r>
-          </a:p>
-        </p:txBody>
-      </p:sp>
-    </p:spTree>
-  </p:cSld>
-  <p:clrMapOvr>
-    <a:masterClrMapping/>
-  </p:clrMapOvr>
-</p:sld>
-</file>
-
-<file path=ppt/slides/slide11.xml><?xml version="1.0" encoding="utf-8"?>
-<p:sld xmlns:a="http://schemas.openxmlformats.org/drawingml/2006/main" xmlns:p="http://schemas.openxmlformats.org/presentationml/2006/main" xmlns:r="http://schemas.openxmlformats.org/officeDocument/2006/relationships">
-  <p:cSld>
-    <p:bg>
-      <p:bgPr>
-        <a:solidFill>
-          <a:srgbClr val="0A1172"/>
-        </a:solidFill>
-        <a:effectLst/>
-      </p:bgPr>
-    </p:bg>
-    <p:spTree>
-      <p:nvGrpSpPr>
-        <p:cNvPr id="1" name=""/>
-        <p:cNvGrpSpPr/>
-        <p:nvPr/>
-      </p:nvGrpSpPr>
-      <p:grpSpPr/>
-      <p:sp>
-        <p:nvSpPr>
-          <p:cNvPr id="2" name="Rectangle 1"/>
-          <p:cNvSpPr/>
-          <p:nvPr/>
-        </p:nvSpPr>
-        <p:spPr>
-          <a:xfrm>
-            <a:off x="0" y="0"/>
-            <a:ext cx="365760" cy="6858000"/>
-          </a:xfrm>
-          <a:prstGeom prst="rect">
-            <a:avLst/>
-          </a:prstGeom>
-          <a:solidFill>
-            <a:srgbClr val="F59E0B"/>
-          </a:solidFill>
-          <a:ln>
-            <a:noFill/>
-          </a:ln>
-          <a:effectLst/>
-        </p:spPr>
-        <p:style>
-          <a:lnRef idx="1">
-            <a:schemeClr val="accent1"/>
-          </a:lnRef>
-          <a:fillRef idx="3">
-            <a:schemeClr val="accent1"/>
-          </a:fillRef>
-          <a:effectRef idx="2">
-            <a:schemeClr val="accent1"/>
-          </a:effectRef>
-          <a:fontRef idx="minor">
-            <a:schemeClr val="lt1"/>
-          </a:fontRef>
-        </p:style>
-        <p:txBody>
-          <a:bodyPr rtlCol="0" anchor="ctr"/>
-          <a:lstStyle/>
-          <a:p>
-            <a:pPr algn="ctr"/>
-          </a:p>
-        </p:txBody>
-      </p:sp>
-      <p:sp>
-        <p:nvSpPr>
-          <p:cNvPr id="3" name="TextBox 2"/>
-          <p:cNvSpPr txBox="1"/>
-          <p:nvPr/>
-        </p:nvSpPr>
-        <p:spPr>
-          <a:xfrm>
-            <a:off x="731520" y="2286000"/>
-            <a:ext cx="10698480" cy="914400"/>
-          </a:xfrm>
-          <a:prstGeom prst="rect">
-            <a:avLst/>
-          </a:prstGeom>
-          <a:noFill/>
-        </p:spPr>
-        <p:txBody>
-          <a:bodyPr wrap="square" anchor="ctr" lIns="45720" rIns="45720">
-            <a:spAutoFit/>
-          </a:bodyPr>
-          <a:lstStyle/>
-          <a:p>
-            <a:pPr algn="ctr"/>
-            <a:r>
-              <a:rPr sz="7200" b="1">
-                <a:solidFill>
-                  <a:srgbClr val="FFFFFF"/>
-                </a:solidFill>
-                <a:latin typeface="Calibri"/>
-              </a:rPr>
-              <a:t>¡Listo!</a:t>
-            </a:r>
-          </a:p>
-        </p:txBody>
-      </p:sp>
-      <p:sp>
-        <p:nvSpPr>
-          <p:cNvPr id="4" name="TextBox 3"/>
-          <p:cNvSpPr txBox="1"/>
-          <p:nvPr/>
-        </p:nvSpPr>
-        <p:spPr>
-          <a:xfrm>
-            <a:off x="731520" y="3474720"/>
-            <a:ext cx="10698480" cy="640080"/>
-          </a:xfrm>
-          <a:prstGeom prst="rect">
-            <a:avLst/>
-          </a:prstGeom>
-          <a:noFill/>
-        </p:spPr>
-        <p:txBody>
-          <a:bodyPr wrap="square" anchor="t" lIns="45720" rIns="45720">
-            <a:spAutoFit/>
-          </a:bodyPr>
-          <a:lstStyle/>
-          <a:p>
-            <a:pPr algn="ctr"/>
-            <a:r>
-              <a:rPr sz="2200" b="0">
-                <a:solidFill>
-                  <a:srgbClr val="F1F5F9"/>
-                </a:solidFill>
-                <a:latin typeface="Calibri"/>
-              </a:rPr>
-              <a:t>Ya puedes comenzar a usar el sistema como Personal</a:t>
-            </a:r>
-          </a:p>
-        </p:txBody>
-      </p:sp>
-      <p:sp>
-        <p:nvSpPr>
-          <p:cNvPr id="5" name="TextBox 4"/>
-          <p:cNvSpPr txBox="1"/>
-          <p:nvPr/>
-        </p:nvSpPr>
-        <p:spPr>
-          <a:xfrm>
-            <a:off x="731520" y="4754880"/>
-            <a:ext cx="10698480" cy="457200"/>
-          </a:xfrm>
-          <a:prstGeom prst="rect">
-            <a:avLst/>
-          </a:prstGeom>
-          <a:noFill/>
-        </p:spPr>
-        <p:txBody>
-          <a:bodyPr wrap="square" anchor="t" lIns="45720" rIns="45720">
-            <a:spAutoFit/>
-          </a:bodyPr>
-          <a:lstStyle/>
-          <a:p>
-            <a:pPr algn="ctr"/>
-            <a:r>
-              <a:rPr sz="1400" b="0">
-                <a:solidFill>
-                  <a:srgbClr val="F59E0B"/>
-                </a:solidFill>
-                <a:latin typeface="Calibri"/>
-              </a:rPr>
-              <a:t>Si tienes dudas, consulta el Manual de Usuario o contacta al administrador</a:t>
-            </a:r>
-          </a:p>
-        </p:txBody>
-      </p:sp>
-      <p:sp>
-        <p:nvSpPr>
-          <p:cNvPr id="6" name="TextBox 5"/>
-          <p:cNvSpPr txBox="1"/>
-          <p:nvPr/>
-        </p:nvSpPr>
-        <p:spPr>
-          <a:xfrm>
-            <a:off x="731520" y="5852160"/>
-            <a:ext cx="10698480" cy="457200"/>
-          </a:xfrm>
-          <a:prstGeom prst="rect">
-            <a:avLst/>
-          </a:prstGeom>
-          <a:noFill/>
-        </p:spPr>
-        <p:txBody>
-          <a:bodyPr wrap="square" anchor="t" lIns="45720" rIns="45720">
-            <a:spAutoFit/>
-          </a:bodyPr>
-          <a:lstStyle/>
-          <a:p>
-            <a:pPr algn="ctr"/>
-            <a:r>
-              <a:rPr sz="1400" b="1">
-                <a:solidFill>
-                  <a:srgbClr val="FFFFFF"/>
-                </a:solidFill>
-                <a:latin typeface="Calibri"/>
-              </a:rPr>
-              <a:t>asesoriasintegralescyj@gmail.com  ·  +56 964 650 643</a:t>
+              <a:t>Condominio Laguna Norte  ·  Junio 2026  ·  v1.1</a:t>
             </a:r>
           </a:p>
         </p:txBody>
@@ -4201,7 +3537,7 @@
                 </a:solidFill>
                 <a:latin typeface="Calibri"/>
               </a:rPr>
-              <a:t>Como Personal (trabajador) tu función es ejecutar las OT asignadas y reportar avances.</a:t>
+              <a:t>Como Personal (trabajador) tu función es ejecutar las OT asignadas.</a:t>
             </a:r>
           </a:p>
         </p:txBody>
@@ -4241,7 +3577,6 @@
                 <a:solidFill>
                   <a:srgbClr val="F59E0B"/>
                 </a:solidFill>
-                <a:latin typeface="Calibri"/>
               </a:rPr>
               <a:t>● </a:t>
             </a:r>
@@ -4250,7 +3585,6 @@
                 <a:solidFill>
                   <a:srgbClr val="0F2040"/>
                 </a:solidFill>
-                <a:latin typeface="Calibri"/>
               </a:rPr>
               <a:t>Ver las OT que te fueron asignadas (no las de otros)</a:t>
             </a:r>
@@ -4269,7 +3603,6 @@
                 <a:solidFill>
                   <a:srgbClr val="F59E0B"/>
                 </a:solidFill>
-                <a:latin typeface="Calibri"/>
               </a:rPr>
               <a:t>● </a:t>
             </a:r>
@@ -4278,7 +3611,6 @@
                 <a:solidFill>
                   <a:srgbClr val="0F2040"/>
                 </a:solidFill>
-                <a:latin typeface="Calibri"/>
               </a:rPr>
               <a:t>Actualizar el progreso de tus OT (0-100%)</a:t>
             </a:r>
@@ -4297,7 +3629,6 @@
                 <a:solidFill>
                   <a:srgbClr val="F59E0B"/>
                 </a:solidFill>
-                <a:latin typeface="Calibri"/>
               </a:rPr>
               <a:t>● </a:t>
             </a:r>
@@ -4306,7 +3637,6 @@
                 <a:solidFill>
                   <a:srgbClr val="0F2040"/>
                 </a:solidFill>
-                <a:latin typeface="Calibri"/>
               </a:rPr>
               <a:t>Marcar OT como "Completado" cuando termines</a:t>
             </a:r>
@@ -4325,7 +3655,6 @@
                 <a:solidFill>
                   <a:srgbClr val="F59E0B"/>
                 </a:solidFill>
-                <a:latin typeface="Calibri"/>
               </a:rPr>
               <a:t>● </a:t>
             </a:r>
@@ -4334,9 +3663,8 @@
                 <a:solidFill>
                   <a:srgbClr val="0F2040"/>
                 </a:solidFill>
-                <a:latin typeface="Calibri"/>
-              </a:rPr>
-              <a:t>Crear Solicitudes de Compra (si necesitas materiales)</a:t>
+              </a:rPr>
+              <a:t>Crear Solicitudes de Compra si necesitas materiales</a:t>
             </a:r>
           </a:p>
           <a:p>
@@ -4353,7 +3681,6 @@
                 <a:solidFill>
                   <a:srgbClr val="F59E0B"/>
                 </a:solidFill>
-                <a:latin typeface="Calibri"/>
               </a:rPr>
               <a:t>● </a:t>
             </a:r>
@@ -4362,7 +3689,6 @@
                 <a:solidFill>
                   <a:srgbClr val="0F2040"/>
                 </a:solidFill>
-                <a:latin typeface="Calibri"/>
               </a:rPr>
               <a:t>Consultar manuales de herramientas</a:t>
             </a:r>
@@ -4381,7 +3707,6 @@
                 <a:solidFill>
                   <a:srgbClr val="F59E0B"/>
                 </a:solidFill>
-                <a:latin typeface="Calibri"/>
               </a:rPr>
               <a:t>● </a:t>
             </a:r>
@@ -4390,7 +3715,6 @@
                 <a:solidFill>
                   <a:srgbClr val="0F2040"/>
                 </a:solidFill>
-                <a:latin typeface="Calibri"/>
               </a:rPr>
               <a:t>Ver tu propio registro de asistencia</a:t>
             </a:r>
@@ -4611,7 +3935,7 @@
                 </a:solidFill>
                 <a:latin typeface="Calibri"/>
               </a:rPr>
-              <a:t>Módulos que puedes ver</a:t>
+              <a:t>Órdenes de Trabajo (solo tus OT)</a:t>
             </a:r>
           </a:p>
         </p:txBody>
@@ -4651,16 +3975,40 @@
           </a:p>
         </p:txBody>
       </p:sp>
-      <p:sp>
-        <p:nvSpPr>
-          <p:cNvPr id="5" name="TextBox 4"/>
+      <p:pic>
+        <p:nvPicPr>
+          <p:cNvPr id="5" name="Picture 4" descr="03_ot_listado.png"/>
+          <p:cNvPicPr>
+            <a:picLocks noChangeAspect="1"/>
+          </p:cNvPicPr>
+          <p:nvPr/>
+        </p:nvPicPr>
+        <p:blipFill>
+          <a:blip r:embed="rId2"/>
+          <a:stretch>
+            <a:fillRect/>
+          </a:stretch>
+        </p:blipFill>
+        <p:spPr>
+          <a:xfrm>
+            <a:off x="1386687" y="1097280"/>
+            <a:ext cx="9418320" cy="5886450"/>
+          </a:xfrm>
+          <a:prstGeom prst="rect">
+            <a:avLst/>
+          </a:prstGeom>
+        </p:spPr>
+      </p:pic>
+      <p:sp>
+        <p:nvSpPr>
+          <p:cNvPr id="6" name="TextBox 5"/>
           <p:cNvSpPr txBox="1"/>
           <p:nvPr/>
         </p:nvSpPr>
         <p:spPr>
           <a:xfrm>
-            <a:off x="457200" y="1005840"/>
-            <a:ext cx="11247120" cy="731520"/>
+            <a:off x="914400" y="6035040"/>
+            <a:ext cx="10332720" cy="457200"/>
           </a:xfrm>
           <a:prstGeom prst="rect">
             <a:avLst/>
@@ -4668,211 +4016,20 @@
           <a:noFill/>
         </p:spPr>
         <p:txBody>
-          <a:bodyPr wrap="square" anchor="t" lIns="45720" rIns="45720">
+          <a:bodyPr wrap="square" anchor="ctr" lIns="45720" rIns="45720">
             <a:spAutoFit/>
           </a:bodyPr>
           <a:lstStyle/>
           <a:p>
-            <a:pPr algn="l"/>
-            <a:r>
-              <a:rPr sz="1400" b="0">
+            <a:pPr algn="ctr"/>
+            <a:r>
+              <a:rPr sz="1200" b="0">
                 <a:solidFill>
                   <a:srgbClr val="666666"/>
                 </a:solidFill>
                 <a:latin typeface="Calibri"/>
               </a:rPr>
-              <a:t>Acceso limitado a módulos relacionados con tu trabajo:</a:t>
-            </a:r>
-          </a:p>
-        </p:txBody>
-      </p:sp>
-      <p:sp>
-        <p:nvSpPr>
-          <p:cNvPr id="6" name="TextBox 5"/>
-          <p:cNvSpPr txBox="1"/>
-          <p:nvPr/>
-        </p:nvSpPr>
-        <p:spPr>
-          <a:xfrm>
-            <a:off x="640080" y="1828800"/>
-            <a:ext cx="10972800" cy="4572000"/>
-          </a:xfrm>
-          <a:prstGeom prst="rect">
-            <a:avLst/>
-          </a:prstGeom>
-          <a:noFill/>
-        </p:spPr>
-        <p:txBody>
-          <a:bodyPr wrap="square">
-            <a:spAutoFit/>
-          </a:bodyPr>
-          <a:lstStyle/>
-          <a:p>
-            <a:pPr algn="l">
-              <a:lnSpc>
-                <a:spcPct val="140000"/>
-              </a:lnSpc>
-              <a:spcAft>
-                <a:spcPts val="800"/>
-              </a:spcAft>
-            </a:pPr>
-            <a:r>
-              <a:rPr sz="1600" b="1">
-                <a:solidFill>
-                  <a:srgbClr val="F59E0B"/>
-                </a:solidFill>
-                <a:latin typeface="Calibri"/>
-              </a:rPr>
-              <a:t>● </a:t>
-            </a:r>
-            <a:r>
-              <a:rPr sz="1600">
-                <a:solidFill>
-                  <a:srgbClr val="0F2040"/>
-                </a:solidFill>
-                <a:latin typeface="Calibri"/>
-              </a:rPr>
-              <a:t>Dashboard (simplificado, muestra tus OT)</a:t>
-            </a:r>
-          </a:p>
-          <a:p>
-            <a:pPr algn="l">
-              <a:lnSpc>
-                <a:spcPct val="140000"/>
-              </a:lnSpc>
-              <a:spcAft>
-                <a:spcPts val="800"/>
-              </a:spcAft>
-            </a:pPr>
-            <a:r>
-              <a:rPr sz="1600" b="1">
-                <a:solidFill>
-                  <a:srgbClr val="F59E0B"/>
-                </a:solidFill>
-                <a:latin typeface="Calibri"/>
-              </a:rPr>
-              <a:t>● </a:t>
-            </a:r>
-            <a:r>
-              <a:rPr sz="1600">
-                <a:solidFill>
-                  <a:srgbClr val="0F2040"/>
-                </a:solidFill>
-                <a:latin typeface="Calibri"/>
-              </a:rPr>
-              <a:t>Órdenes de Trabajo (solo las asignadas a ti)</a:t>
-            </a:r>
-          </a:p>
-          <a:p>
-            <a:pPr algn="l">
-              <a:lnSpc>
-                <a:spcPct val="140000"/>
-              </a:lnSpc>
-              <a:spcAft>
-                <a:spcPts val="800"/>
-              </a:spcAft>
-            </a:pPr>
-            <a:r>
-              <a:rPr sz="1600" b="1">
-                <a:solidFill>
-                  <a:srgbClr val="F59E0B"/>
-                </a:solidFill>
-                <a:latin typeface="Calibri"/>
-              </a:rPr>
-              <a:t>● </a:t>
-            </a:r>
-            <a:r>
-              <a:rPr sz="1600">
-                <a:solidFill>
-                  <a:srgbClr val="0F2040"/>
-                </a:solidFill>
-                <a:latin typeface="Calibri"/>
-              </a:rPr>
-              <a:t>Control de Asistencia</a:t>
-            </a:r>
-          </a:p>
-          <a:p>
-            <a:pPr algn="l">
-              <a:lnSpc>
-                <a:spcPct val="140000"/>
-              </a:lnSpc>
-              <a:spcAft>
-                <a:spcPts val="800"/>
-              </a:spcAft>
-            </a:pPr>
-            <a:r>
-              <a:rPr sz="1600" b="1">
-                <a:solidFill>
-                  <a:srgbClr val="F59E0B"/>
-                </a:solidFill>
-                <a:latin typeface="Calibri"/>
-              </a:rPr>
-              <a:t>● </a:t>
-            </a:r>
-            <a:r>
-              <a:rPr sz="1600">
-                <a:solidFill>
-                  <a:srgbClr val="0F2040"/>
-                </a:solidFill>
-                <a:latin typeface="Calibri"/>
-              </a:rPr>
-              <a:t>Herramientas (con manuales de uso)</a:t>
-            </a:r>
-          </a:p>
-          <a:p>
-            <a:pPr algn="l">
-              <a:lnSpc>
-                <a:spcPct val="140000"/>
-              </a:lnSpc>
-              <a:spcAft>
-                <a:spcPts val="800"/>
-              </a:spcAft>
-            </a:pPr>
-            <a:r>
-              <a:rPr sz="1600" b="1">
-                <a:solidFill>
-                  <a:srgbClr val="F59E0B"/>
-                </a:solidFill>
-                <a:latin typeface="Calibri"/>
-              </a:rPr>
-              <a:t>● </a:t>
-            </a:r>
-            <a:r>
-              <a:rPr sz="1600">
-                <a:solidFill>
-                  <a:srgbClr val="0F2040"/>
-                </a:solidFill>
-                <a:latin typeface="Calibri"/>
-              </a:rPr>
-              <a:t>Solicitud de Compras (crear + ver propias)</a:t>
-            </a:r>
-          </a:p>
-          <a:p>
-            <a:pPr algn="l">
-              <a:lnSpc>
-                <a:spcPct val="140000"/>
-              </a:lnSpc>
-              <a:spcAft>
-                <a:spcPts val="800"/>
-              </a:spcAft>
-            </a:pPr>
-            <a:r>
-              <a:rPr sz="1600" b="1">
-                <a:solidFill>
-                  <a:srgbClr val="F59E0B"/>
-                </a:solidFill>
-                <a:latin typeface="Calibri"/>
-              </a:rPr>
-              <a:t>● </a:t>
-            </a:r>
-            <a:r>
-              <a:rPr sz="1600">
-                <a:solidFill>
-                  <a:srgbClr val="0F2040"/>
-                </a:solidFill>
-                <a:latin typeface="Calibri"/>
-              </a:rPr>
-              <a:t>Notificaciones (relacionadas con tus OT)</a:t>
+              <a:t>Solo verás las OT donde estás asignado — no las de otros trabajadores</a:t>
             </a:r>
           </a:p>
         </p:txBody>
@@ -5091,7 +4248,7 @@
                 </a:solidFill>
                 <a:latin typeface="Calibri"/>
               </a:rPr>
-              <a:t>Importante: No ves Aprobaciones OT</a:t>
+              <a:t>Flujo: Actualizar progreso de OT</a:t>
             </a:r>
           </a:p>
         </p:txBody>
@@ -5133,20 +4290,260 @@
       </p:sp>
       <p:sp>
         <p:nvSpPr>
-          <p:cNvPr id="5" name="Rounded Rectangle 4"/>
+          <p:cNvPr id="5" name="TextBox 4"/>
+          <p:cNvSpPr txBox="1"/>
+          <p:nvPr/>
+        </p:nvSpPr>
+        <p:spPr>
+          <a:xfrm>
+            <a:off x="457200" y="1005840"/>
+            <a:ext cx="11247120" cy="548640"/>
+          </a:xfrm>
+          <a:prstGeom prst="rect">
+            <a:avLst/>
+          </a:prstGeom>
+          <a:noFill/>
+        </p:spPr>
+        <p:txBody>
+          <a:bodyPr wrap="square" anchor="t" lIns="45720" rIns="45720">
+            <a:spAutoFit/>
+          </a:bodyPr>
+          <a:lstStyle/>
+          <a:p>
+            <a:pPr algn="l"/>
+            <a:r>
+              <a:rPr sz="1400" b="0">
+                <a:solidFill>
+                  <a:srgbClr val="666666"/>
+                </a:solidFill>
+                <a:latin typeface="Calibri"/>
+              </a:rPr>
+              <a:t>Cómo reportar el avance de tus OT:</a:t>
+            </a:r>
+          </a:p>
+        </p:txBody>
+      </p:sp>
+      <p:sp>
+        <p:nvSpPr>
+          <p:cNvPr id="6" name="TextBox 5"/>
+          <p:cNvSpPr txBox="1"/>
+          <p:nvPr/>
+        </p:nvSpPr>
+        <p:spPr>
+          <a:xfrm>
+            <a:off x="640080" y="1645920"/>
+            <a:ext cx="10972800" cy="4572000"/>
+          </a:xfrm>
+          <a:prstGeom prst="rect">
+            <a:avLst/>
+          </a:prstGeom>
+          <a:noFill/>
+        </p:spPr>
+        <p:txBody>
+          <a:bodyPr wrap="square">
+            <a:spAutoFit/>
+          </a:bodyPr>
+          <a:lstStyle/>
+          <a:p>
+            <a:pPr algn="l">
+              <a:lnSpc>
+                <a:spcPct val="150000"/>
+              </a:lnSpc>
+              <a:spcAft>
+                <a:spcPts val="1000"/>
+              </a:spcAft>
+            </a:pPr>
+            <a:r>
+              <a:rPr sz="2000" b="1">
+                <a:solidFill>
+                  <a:srgbClr val="F59E0B"/>
+                </a:solidFill>
+              </a:rPr>
+              <a:t>1.  </a:t>
+            </a:r>
+            <a:r>
+              <a:rPr sz="1600">
+                <a:solidFill>
+                  <a:srgbClr val="0F2040"/>
+                </a:solidFill>
+              </a:rPr>
+              <a:t>Inicia sesión y ve a Órdenes de Trabajo</a:t>
+            </a:r>
+          </a:p>
+          <a:p>
+            <a:pPr algn="l">
+              <a:lnSpc>
+                <a:spcPct val="150000"/>
+              </a:lnSpc>
+              <a:spcAft>
+                <a:spcPts val="1000"/>
+              </a:spcAft>
+            </a:pPr>
+            <a:r>
+              <a:rPr sz="2000" b="1">
+                <a:solidFill>
+                  <a:srgbClr val="F59E0B"/>
+                </a:solidFill>
+              </a:rPr>
+              <a:t>2.  </a:t>
+            </a:r>
+            <a:r>
+              <a:rPr sz="1600">
+                <a:solidFill>
+                  <a:srgbClr val="0F2040"/>
+                </a:solidFill>
+              </a:rPr>
+              <a:t>Solo verás las OT donde estás asignado</a:t>
+            </a:r>
+          </a:p>
+          <a:p>
+            <a:pPr algn="l">
+              <a:lnSpc>
+                <a:spcPct val="150000"/>
+              </a:lnSpc>
+              <a:spcAft>
+                <a:spcPts val="1000"/>
+              </a:spcAft>
+            </a:pPr>
+            <a:r>
+              <a:rPr sz="2000" b="1">
+                <a:solidFill>
+                  <a:srgbClr val="F59E0B"/>
+                </a:solidFill>
+              </a:rPr>
+              <a:t>3.  </a:t>
+            </a:r>
+            <a:r>
+              <a:rPr sz="1600">
+                <a:solidFill>
+                  <a:srgbClr val="0F2040"/>
+                </a:solidFill>
+              </a:rPr>
+              <a:t>Haz clic en la OT para abrir el detalle</a:t>
+            </a:r>
+          </a:p>
+          <a:p>
+            <a:pPr algn="l">
+              <a:lnSpc>
+                <a:spcPct val="150000"/>
+              </a:lnSpc>
+              <a:spcAft>
+                <a:spcPts val="1000"/>
+              </a:spcAft>
+            </a:pPr>
+            <a:r>
+              <a:rPr sz="2000" b="1">
+                <a:solidFill>
+                  <a:srgbClr val="F59E0B"/>
+                </a:solidFill>
+              </a:rPr>
+              <a:t>4.  </a:t>
+            </a:r>
+            <a:r>
+              <a:rPr sz="1600">
+                <a:solidFill>
+                  <a:srgbClr val="0F2040"/>
+                </a:solidFill>
+              </a:rPr>
+              <a:t>Actualiza el porcentaje de progreso (0-100%)</a:t>
+            </a:r>
+          </a:p>
+          <a:p>
+            <a:pPr algn="l">
+              <a:lnSpc>
+                <a:spcPct val="150000"/>
+              </a:lnSpc>
+              <a:spcAft>
+                <a:spcPts val="1000"/>
+              </a:spcAft>
+            </a:pPr>
+            <a:r>
+              <a:rPr sz="2000" b="1">
+                <a:solidFill>
+                  <a:srgbClr val="F59E0B"/>
+                </a:solidFill>
+              </a:rPr>
+              <a:t>5.  </a:t>
+            </a:r>
+            <a:r>
+              <a:rPr sz="1600">
+                <a:solidFill>
+                  <a:srgbClr val="0F2040"/>
+                </a:solidFill>
+              </a:rPr>
+              <a:t>Cambia el estado si es necesario</a:t>
+            </a:r>
+          </a:p>
+          <a:p>
+            <a:pPr algn="l">
+              <a:lnSpc>
+                <a:spcPct val="150000"/>
+              </a:lnSpc>
+              <a:spcAft>
+                <a:spcPts val="1000"/>
+              </a:spcAft>
+            </a:pPr>
+            <a:r>
+              <a:rPr sz="2000" b="1">
+                <a:solidFill>
+                  <a:srgbClr val="F59E0B"/>
+                </a:solidFill>
+              </a:rPr>
+              <a:t>6.  </a:t>
+            </a:r>
+            <a:r>
+              <a:rPr sz="1600">
+                <a:solidFill>
+                  <a:srgbClr val="0F2040"/>
+                </a:solidFill>
+              </a:rPr>
+              <a:t>Cuando llegues a 100%, marca como "Completado"</a:t>
+            </a:r>
+          </a:p>
+          <a:p>
+            <a:pPr algn="l">
+              <a:lnSpc>
+                <a:spcPct val="150000"/>
+              </a:lnSpc>
+              <a:spcAft>
+                <a:spcPts val="1000"/>
+              </a:spcAft>
+            </a:pPr>
+            <a:r>
+              <a:rPr sz="2000" b="1">
+                <a:solidFill>
+                  <a:srgbClr val="F59E0B"/>
+                </a:solidFill>
+              </a:rPr>
+              <a:t>7.  </a:t>
+            </a:r>
+            <a:r>
+              <a:rPr sz="1600">
+                <a:solidFill>
+                  <a:srgbClr val="0F2040"/>
+                </a:solidFill>
+              </a:rPr>
+              <a:t>La OT pasará al supervisor/admin para aprobación</a:t>
+            </a:r>
+          </a:p>
+        </p:txBody>
+      </p:sp>
+      <p:sp>
+        <p:nvSpPr>
+          <p:cNvPr id="7" name="Rectangle 6"/>
           <p:cNvSpPr/>
           <p:nvPr/>
         </p:nvSpPr>
         <p:spPr>
           <a:xfrm>
-            <a:off x="914400" y="1828800"/>
-            <a:ext cx="10332720" cy="3200400"/>
-          </a:xfrm>
-          <a:prstGeom prst="roundRect">
+            <a:off x="0" y="6583680"/>
+            <a:ext cx="12191695" cy="274320"/>
+          </a:xfrm>
+          <a:prstGeom prst="rect">
             <a:avLst/>
           </a:prstGeom>
           <a:solidFill>
-            <a:srgbClr val="F1F5F9"/>
+            <a:srgbClr val="0F2040"/>
           </a:solidFill>
           <a:ln>
             <a:noFill/>
@@ -5177,20 +4574,116 @@
       </p:sp>
       <p:sp>
         <p:nvSpPr>
-          <p:cNvPr id="6" name="Rectangle 5"/>
+          <p:cNvPr id="8" name="TextBox 7"/>
+          <p:cNvSpPr txBox="1"/>
+          <p:nvPr/>
+        </p:nvSpPr>
+        <p:spPr>
+          <a:xfrm>
+            <a:off x="365760" y="6583680"/>
+            <a:ext cx="6400800" cy="274320"/>
+          </a:xfrm>
+          <a:prstGeom prst="rect">
+            <a:avLst/>
+          </a:prstGeom>
+          <a:noFill/>
+        </p:spPr>
+        <p:txBody>
+          <a:bodyPr wrap="square" anchor="ctr" lIns="45720" rIns="45720">
+            <a:spAutoFit/>
+          </a:bodyPr>
+          <a:lstStyle/>
+          <a:p>
+            <a:pPr algn="l"/>
+            <a:r>
+              <a:rPr sz="900" b="0">
+                <a:solidFill>
+                  <a:srgbClr val="FFFFFF"/>
+                </a:solidFill>
+                <a:latin typeface="Calibri"/>
+              </a:rPr>
+              <a:t>Asesorías Integrales CyJ · Capacitación Personal</a:t>
+            </a:r>
+          </a:p>
+        </p:txBody>
+      </p:sp>
+      <p:sp>
+        <p:nvSpPr>
+          <p:cNvPr id="9" name="TextBox 8"/>
+          <p:cNvSpPr txBox="1"/>
+          <p:nvPr/>
+        </p:nvSpPr>
+        <p:spPr>
+          <a:xfrm>
+            <a:off x="7315200" y="6583680"/>
+            <a:ext cx="4572000" cy="274320"/>
+          </a:xfrm>
+          <a:prstGeom prst="rect">
+            <a:avLst/>
+          </a:prstGeom>
+          <a:noFill/>
+        </p:spPr>
+        <p:txBody>
+          <a:bodyPr wrap="square" anchor="ctr" lIns="45720" rIns="45720">
+            <a:spAutoFit/>
+          </a:bodyPr>
+          <a:lstStyle/>
+          <a:p>
+            <a:pPr algn="r"/>
+            <a:r>
+              <a:rPr sz="900" b="0">
+                <a:solidFill>
+                  <a:srgbClr val="F59E0B"/>
+                </a:solidFill>
+                <a:latin typeface="Calibri"/>
+              </a:rPr>
+              <a:t>https://condominios-cyj.vercel.app</a:t>
+            </a:r>
+          </a:p>
+        </p:txBody>
+      </p:sp>
+    </p:spTree>
+  </p:cSld>
+  <p:clrMapOvr>
+    <a:masterClrMapping/>
+  </p:clrMapOvr>
+</p:sld>
+</file>
+
+<file path=ppt/slides/slide5.xml><?xml version="1.0" encoding="utf-8"?>
+<p:sld xmlns:a="http://schemas.openxmlformats.org/drawingml/2006/main" xmlns:p="http://schemas.openxmlformats.org/presentationml/2006/main" xmlns:r="http://schemas.openxmlformats.org/officeDocument/2006/relationships">
+  <p:cSld>
+    <p:bg>
+      <p:bgPr>
+        <a:solidFill>
+          <a:srgbClr val="FFFFFF"/>
+        </a:solidFill>
+        <a:effectLst/>
+      </p:bgPr>
+    </p:bg>
+    <p:spTree>
+      <p:nvGrpSpPr>
+        <p:cNvPr id="1" name=""/>
+        <p:cNvGrpSpPr/>
+        <p:nvPr/>
+      </p:nvGrpSpPr>
+      <p:grpSpPr/>
+      <p:sp>
+        <p:nvSpPr>
+          <p:cNvPr id="2" name="Rectangle 1"/>
           <p:cNvSpPr/>
           <p:nvPr/>
         </p:nvSpPr>
         <p:spPr>
           <a:xfrm>
-            <a:off x="914400" y="1828800"/>
-            <a:ext cx="137160" cy="3200400"/>
+            <a:off x="0" y="0"/>
+            <a:ext cx="12191695" cy="822960"/>
           </a:xfrm>
           <a:prstGeom prst="rect">
             <a:avLst/>
           </a:prstGeom>
           <a:solidFill>
-            <a:srgbClr val="0369A1"/>
+            <a:srgbClr val="0A1172"/>
           </a:solidFill>
           <a:ln>
             <a:noFill/>
@@ -5221,14 +4714,14 @@
       </p:sp>
       <p:sp>
         <p:nvSpPr>
-          <p:cNvPr id="7" name="TextBox 6"/>
+          <p:cNvPr id="3" name="TextBox 2"/>
           <p:cNvSpPr txBox="1"/>
           <p:nvPr/>
         </p:nvSpPr>
         <p:spPr>
           <a:xfrm>
-            <a:off x="1371600" y="2103120"/>
-            <a:ext cx="1828800" cy="1828800"/>
+            <a:off x="365760" y="137160"/>
+            <a:ext cx="10058400" cy="548640"/>
           </a:xfrm>
           <a:prstGeom prst="rect">
             <a:avLst/>
@@ -5241,29 +4734,29 @@
           </a:bodyPr>
           <a:lstStyle/>
           <a:p>
-            <a:pPr algn="ctr"/>
-            <a:r>
-              <a:rPr sz="8000" b="0">
-                <a:solidFill>
-                  <a:srgbClr val="0369A1"/>
+            <a:pPr algn="l"/>
+            <a:r>
+              <a:rPr sz="2200" b="1">
+                <a:solidFill>
+                  <a:srgbClr val="FFFFFF"/>
                 </a:solidFill>
                 <a:latin typeface="Calibri"/>
               </a:rPr>
-              <a:t>ℹ️</a:t>
-            </a:r>
-          </a:p>
-        </p:txBody>
-      </p:sp>
-      <p:sp>
-        <p:nvSpPr>
-          <p:cNvPr id="8" name="TextBox 7"/>
+              <a:t>Crear Solicitud de Compra</a:t>
+            </a:r>
+          </a:p>
+        </p:txBody>
+      </p:sp>
+      <p:sp>
+        <p:nvSpPr>
+          <p:cNvPr id="4" name="TextBox 3"/>
           <p:cNvSpPr txBox="1"/>
           <p:nvPr/>
         </p:nvSpPr>
         <p:spPr>
           <a:xfrm>
-            <a:off x="3474720" y="2103120"/>
-            <a:ext cx="7498079" cy="2743200"/>
+            <a:off x="11247120" y="137160"/>
+            <a:ext cx="731520" cy="548640"/>
           </a:xfrm>
           <a:prstGeom prst="rect">
             <a:avLst/>
@@ -5276,22 +4769,81 @@
           </a:bodyPr>
           <a:lstStyle/>
           <a:p>
-            <a:pPr algn="l"/>
-            <a:r>
-              <a:rPr sz="1800" b="0">
-                <a:solidFill>
-                  <a:srgbClr val="0F2040"/>
+            <a:pPr algn="r"/>
+            <a:r>
+              <a:rPr sz="1400" b="0">
+                <a:solidFill>
+                  <a:srgbClr val="F59E0B"/>
                 </a:solidFill>
                 <a:latin typeface="Calibri"/>
               </a:rPr>
-              <a:t>El módulo "Aprobaciones OT" NO está disponible para tu rol. Eso es porque tú completas las OT pero no las apruebas. La aprobación la hace el supervisor o administrador después de que tú marcas la OT como completada.</a:t>
-            </a:r>
-          </a:p>
-        </p:txBody>
-      </p:sp>
-      <p:sp>
-        <p:nvSpPr>
-          <p:cNvPr id="9" name="Rectangle 8"/>
+              <a:t>5</a:t>
+            </a:r>
+          </a:p>
+        </p:txBody>
+      </p:sp>
+      <p:pic>
+        <p:nvPicPr>
+          <p:cNvPr id="5" name="Picture 4" descr="11_sc_crear.png"/>
+          <p:cNvPicPr>
+            <a:picLocks noChangeAspect="1"/>
+          </p:cNvPicPr>
+          <p:nvPr/>
+        </p:nvPicPr>
+        <p:blipFill>
+          <a:blip r:embed="rId2"/>
+          <a:stretch>
+            <a:fillRect/>
+          </a:stretch>
+        </p:blipFill>
+        <p:spPr>
+          <a:xfrm>
+            <a:off x="1386687" y="1097280"/>
+            <a:ext cx="9418320" cy="5886450"/>
+          </a:xfrm>
+          <a:prstGeom prst="rect">
+            <a:avLst/>
+          </a:prstGeom>
+        </p:spPr>
+      </p:pic>
+      <p:sp>
+        <p:nvSpPr>
+          <p:cNvPr id="6" name="TextBox 5"/>
+          <p:cNvSpPr txBox="1"/>
+          <p:nvPr/>
+        </p:nvSpPr>
+        <p:spPr>
+          <a:xfrm>
+            <a:off x="914400" y="6035040"/>
+            <a:ext cx="10332720" cy="457200"/>
+          </a:xfrm>
+          <a:prstGeom prst="rect">
+            <a:avLst/>
+          </a:prstGeom>
+          <a:noFill/>
+        </p:spPr>
+        <p:txBody>
+          <a:bodyPr wrap="square" anchor="ctr" lIns="45720" rIns="45720">
+            <a:spAutoFit/>
+          </a:bodyPr>
+          <a:lstStyle/>
+          <a:p>
+            <a:pPr algn="ctr"/>
+            <a:r>
+              <a:rPr sz="1200" b="0">
+                <a:solidFill>
+                  <a:srgbClr val="666666"/>
+                </a:solidFill>
+                <a:latin typeface="Calibri"/>
+              </a:rPr>
+              <a:t>Si necesitas materiales para una OT, puedes solicitarlos</a:t>
+            </a:r>
+          </a:p>
+        </p:txBody>
+      </p:sp>
+      <p:sp>
+        <p:nvSpPr>
+          <p:cNvPr id="7" name="Rectangle 6"/>
           <p:cNvSpPr/>
           <p:nvPr/>
         </p:nvSpPr>
@@ -5335,7 +4887,7 @@
       </p:sp>
       <p:sp>
         <p:nvSpPr>
-          <p:cNvPr id="10" name="TextBox 9"/>
+          <p:cNvPr id="8" name="TextBox 7"/>
           <p:cNvSpPr txBox="1"/>
           <p:nvPr/>
         </p:nvSpPr>
@@ -5370,226 +4922,7 @@
       </p:sp>
       <p:sp>
         <p:nvSpPr>
-          <p:cNvPr id="11" name="TextBox 10"/>
-          <p:cNvSpPr txBox="1"/>
-          <p:nvPr/>
-        </p:nvSpPr>
-        <p:spPr>
-          <a:xfrm>
-            <a:off x="7315200" y="6583680"/>
-            <a:ext cx="4572000" cy="274320"/>
-          </a:xfrm>
-          <a:prstGeom prst="rect">
-            <a:avLst/>
-          </a:prstGeom>
-          <a:noFill/>
-        </p:spPr>
-        <p:txBody>
-          <a:bodyPr wrap="square" anchor="ctr" lIns="45720" rIns="45720">
-            <a:spAutoFit/>
-          </a:bodyPr>
-          <a:lstStyle/>
-          <a:p>
-            <a:pPr algn="r"/>
-            <a:r>
-              <a:rPr sz="900" b="0">
-                <a:solidFill>
-                  <a:srgbClr val="F59E0B"/>
-                </a:solidFill>
-                <a:latin typeface="Calibri"/>
-              </a:rPr>
-              <a:t>https://condominios-cyj.vercel.app</a:t>
-            </a:r>
-          </a:p>
-        </p:txBody>
-      </p:sp>
-    </p:spTree>
-  </p:cSld>
-  <p:clrMapOvr>
-    <a:masterClrMapping/>
-  </p:clrMapOvr>
-</p:sld>
-</file>
-
-<file path=ppt/slides/slide5.xml><?xml version="1.0" encoding="utf-8"?>
-<p:sld xmlns:a="http://schemas.openxmlformats.org/drawingml/2006/main" xmlns:p="http://schemas.openxmlformats.org/presentationml/2006/main" xmlns:r="http://schemas.openxmlformats.org/officeDocument/2006/relationships">
-  <p:cSld>
-    <p:bg>
-      <p:bgPr>
-        <a:solidFill>
-          <a:srgbClr val="0F2040"/>
-        </a:solidFill>
-        <a:effectLst/>
-      </p:bgPr>
-    </p:bg>
-    <p:spTree>
-      <p:nvGrpSpPr>
-        <p:cNvPr id="1" name=""/>
-        <p:cNvGrpSpPr/>
-        <p:nvPr/>
-      </p:nvGrpSpPr>
-      <p:grpSpPr/>
-      <p:sp>
-        <p:nvSpPr>
-          <p:cNvPr id="2" name="Rectangle 1"/>
-          <p:cNvSpPr/>
-          <p:nvPr/>
-        </p:nvSpPr>
-        <p:spPr>
-          <a:xfrm>
-            <a:off x="0" y="3108960"/>
-            <a:ext cx="12191695" cy="73152"/>
-          </a:xfrm>
-          <a:prstGeom prst="rect">
-            <a:avLst/>
-          </a:prstGeom>
-          <a:solidFill>
-            <a:srgbClr val="F59E0B"/>
-          </a:solidFill>
-          <a:ln>
-            <a:noFill/>
-          </a:ln>
-          <a:effectLst/>
-        </p:spPr>
-        <p:style>
-          <a:lnRef idx="1">
-            <a:schemeClr val="accent1"/>
-          </a:lnRef>
-          <a:fillRef idx="3">
-            <a:schemeClr val="accent1"/>
-          </a:fillRef>
-          <a:effectRef idx="2">
-            <a:schemeClr val="accent1"/>
-          </a:effectRef>
-          <a:fontRef idx="minor">
-            <a:schemeClr val="lt1"/>
-          </a:fontRef>
-        </p:style>
-        <p:txBody>
-          <a:bodyPr rtlCol="0" anchor="ctr"/>
-          <a:lstStyle/>
-          <a:p>
-            <a:pPr algn="ctr"/>
-          </a:p>
-        </p:txBody>
-      </p:sp>
-      <p:sp>
-        <p:nvSpPr>
-          <p:cNvPr id="3" name="TextBox 2"/>
-          <p:cNvSpPr txBox="1"/>
-          <p:nvPr/>
-        </p:nvSpPr>
-        <p:spPr>
-          <a:xfrm>
-            <a:off x="731520" y="2560320"/>
-            <a:ext cx="10698480" cy="640080"/>
-          </a:xfrm>
-          <a:prstGeom prst="rect">
-            <a:avLst/>
-          </a:prstGeom>
-          <a:noFill/>
-        </p:spPr>
-        <p:txBody>
-          <a:bodyPr wrap="square" anchor="ctr" lIns="45720" rIns="45720">
-            <a:spAutoFit/>
-          </a:bodyPr>
-          <a:lstStyle/>
-          <a:p>
-            <a:pPr algn="ctr"/>
-            <a:r>
-              <a:rPr sz="3600" b="1">
-                <a:solidFill>
-                  <a:srgbClr val="FFFFFF"/>
-                </a:solidFill>
-                <a:latin typeface="Calibri"/>
-              </a:rPr>
-              <a:t>Tu flujo de trabajo</a:t>
-            </a:r>
-          </a:p>
-        </p:txBody>
-      </p:sp>
-      <p:sp>
-        <p:nvSpPr>
-          <p:cNvPr id="4" name="Rectangle 3"/>
-          <p:cNvSpPr/>
-          <p:nvPr/>
-        </p:nvSpPr>
-        <p:spPr>
-          <a:xfrm>
-            <a:off x="0" y="6583680"/>
-            <a:ext cx="12191695" cy="274320"/>
-          </a:xfrm>
-          <a:prstGeom prst="rect">
-            <a:avLst/>
-          </a:prstGeom>
-          <a:solidFill>
-            <a:srgbClr val="0F2040"/>
-          </a:solidFill>
-          <a:ln>
-            <a:noFill/>
-          </a:ln>
-          <a:effectLst/>
-        </p:spPr>
-        <p:style>
-          <a:lnRef idx="1">
-            <a:schemeClr val="accent1"/>
-          </a:lnRef>
-          <a:fillRef idx="3">
-            <a:schemeClr val="accent1"/>
-          </a:fillRef>
-          <a:effectRef idx="2">
-            <a:schemeClr val="accent1"/>
-          </a:effectRef>
-          <a:fontRef idx="minor">
-            <a:schemeClr val="lt1"/>
-          </a:fontRef>
-        </p:style>
-        <p:txBody>
-          <a:bodyPr rtlCol="0" anchor="ctr"/>
-          <a:lstStyle/>
-          <a:p>
-            <a:pPr algn="ctr"/>
-          </a:p>
-        </p:txBody>
-      </p:sp>
-      <p:sp>
-        <p:nvSpPr>
-          <p:cNvPr id="5" name="TextBox 4"/>
-          <p:cNvSpPr txBox="1"/>
-          <p:nvPr/>
-        </p:nvSpPr>
-        <p:spPr>
-          <a:xfrm>
-            <a:off x="365760" y="6583680"/>
-            <a:ext cx="6400800" cy="274320"/>
-          </a:xfrm>
-          <a:prstGeom prst="rect">
-            <a:avLst/>
-          </a:prstGeom>
-          <a:noFill/>
-        </p:spPr>
-        <p:txBody>
-          <a:bodyPr wrap="square" anchor="ctr" lIns="45720" rIns="45720">
-            <a:spAutoFit/>
-          </a:bodyPr>
-          <a:lstStyle/>
-          <a:p>
-            <a:pPr algn="l"/>
-            <a:r>
-              <a:rPr sz="900" b="0">
-                <a:solidFill>
-                  <a:srgbClr val="FFFFFF"/>
-                </a:solidFill>
-                <a:latin typeface="Calibri"/>
-              </a:rPr>
-              <a:t>Asesorías Integrales CyJ · Capacitación Personal</a:t>
-            </a:r>
-          </a:p>
-        </p:txBody>
-      </p:sp>
-      <p:sp>
-        <p:nvSpPr>
-          <p:cNvPr id="6" name="TextBox 5"/>
+          <p:cNvPr id="9" name="TextBox 8"/>
           <p:cNvSpPr txBox="1"/>
           <p:nvPr/>
         </p:nvSpPr>
@@ -5722,7 +5055,7 @@
                 </a:solidFill>
                 <a:latin typeface="Calibri"/>
               </a:rPr>
-              <a:t>Flujo: Actualizar progreso de OT</a:t>
+              <a:t>Herramientas y Manuales</a:t>
             </a:r>
           </a:p>
         </p:txBody>
@@ -5762,16 +5095,40 @@
           </a:p>
         </p:txBody>
       </p:sp>
-      <p:sp>
-        <p:nvSpPr>
-          <p:cNvPr id="5" name="TextBox 4"/>
+      <p:pic>
+        <p:nvPicPr>
+          <p:cNvPr id="5" name="Picture 4" descr="09_manuales.png"/>
+          <p:cNvPicPr>
+            <a:picLocks noChangeAspect="1"/>
+          </p:cNvPicPr>
+          <p:nvPr/>
+        </p:nvPicPr>
+        <p:blipFill>
+          <a:blip r:embed="rId2"/>
+          <a:stretch>
+            <a:fillRect/>
+          </a:stretch>
+        </p:blipFill>
+        <p:spPr>
+          <a:xfrm>
+            <a:off x="1386687" y="1097280"/>
+            <a:ext cx="9418320" cy="5886450"/>
+          </a:xfrm>
+          <a:prstGeom prst="rect">
+            <a:avLst/>
+          </a:prstGeom>
+        </p:spPr>
+      </p:pic>
+      <p:sp>
+        <p:nvSpPr>
+          <p:cNvPr id="6" name="TextBox 5"/>
           <p:cNvSpPr txBox="1"/>
           <p:nvPr/>
         </p:nvSpPr>
         <p:spPr>
           <a:xfrm>
-            <a:off x="457200" y="1005840"/>
-            <a:ext cx="11247120" cy="548640"/>
+            <a:off x="914400" y="6035040"/>
+            <a:ext cx="10332720" cy="457200"/>
           </a:xfrm>
           <a:prstGeom prst="rect">
             <a:avLst/>
@@ -5779,239 +5136,20 @@
           <a:noFill/>
         </p:spPr>
         <p:txBody>
-          <a:bodyPr wrap="square" anchor="t" lIns="45720" rIns="45720">
+          <a:bodyPr wrap="square" anchor="ctr" lIns="45720" rIns="45720">
             <a:spAutoFit/>
           </a:bodyPr>
           <a:lstStyle/>
           <a:p>
-            <a:pPr algn="l"/>
-            <a:r>
-              <a:rPr sz="1400" b="0">
+            <a:pPr algn="ctr"/>
+            <a:r>
+              <a:rPr sz="1200" b="0">
                 <a:solidFill>
                   <a:srgbClr val="666666"/>
                 </a:solidFill>
                 <a:latin typeface="Calibri"/>
               </a:rPr>
-              <a:t>Cómo reportar el avance de tus Órdenes de Trabajo:</a:t>
-            </a:r>
-          </a:p>
-        </p:txBody>
-      </p:sp>
-      <p:sp>
-        <p:nvSpPr>
-          <p:cNvPr id="6" name="TextBox 5"/>
-          <p:cNvSpPr txBox="1"/>
-          <p:nvPr/>
-        </p:nvSpPr>
-        <p:spPr>
-          <a:xfrm>
-            <a:off x="640080" y="1645920"/>
-            <a:ext cx="10972800" cy="4572000"/>
-          </a:xfrm>
-          <a:prstGeom prst="rect">
-            <a:avLst/>
-          </a:prstGeom>
-          <a:noFill/>
-        </p:spPr>
-        <p:txBody>
-          <a:bodyPr wrap="square">
-            <a:spAutoFit/>
-          </a:bodyPr>
-          <a:lstStyle/>
-          <a:p>
-            <a:pPr algn="l">
-              <a:lnSpc>
-                <a:spcPct val="150000"/>
-              </a:lnSpc>
-              <a:spcAft>
-                <a:spcPts val="1000"/>
-              </a:spcAft>
-            </a:pPr>
-            <a:r>
-              <a:rPr sz="2000" b="1">
-                <a:solidFill>
-                  <a:srgbClr val="F59E0B"/>
-                </a:solidFill>
-                <a:latin typeface="Calibri"/>
-              </a:rPr>
-              <a:t>1.  </a:t>
-            </a:r>
-            <a:r>
-              <a:rPr sz="1600">
-                <a:solidFill>
-                  <a:srgbClr val="0F2040"/>
-                </a:solidFill>
-                <a:latin typeface="Calibri"/>
-              </a:rPr>
-              <a:t>Inicia sesión y ve a Órdenes de Trabajo</a:t>
-            </a:r>
-          </a:p>
-          <a:p>
-            <a:pPr algn="l">
-              <a:lnSpc>
-                <a:spcPct val="150000"/>
-              </a:lnSpc>
-              <a:spcAft>
-                <a:spcPts val="1000"/>
-              </a:spcAft>
-            </a:pPr>
-            <a:r>
-              <a:rPr sz="2000" b="1">
-                <a:solidFill>
-                  <a:srgbClr val="F59E0B"/>
-                </a:solidFill>
-                <a:latin typeface="Calibri"/>
-              </a:rPr>
-              <a:t>2.  </a:t>
-            </a:r>
-            <a:r>
-              <a:rPr sz="1600">
-                <a:solidFill>
-                  <a:srgbClr val="0F2040"/>
-                </a:solidFill>
-                <a:latin typeface="Calibri"/>
-              </a:rPr>
-              <a:t>Solo verás las OT donde estás asignado</a:t>
-            </a:r>
-          </a:p>
-          <a:p>
-            <a:pPr algn="l">
-              <a:lnSpc>
-                <a:spcPct val="150000"/>
-              </a:lnSpc>
-              <a:spcAft>
-                <a:spcPts val="1000"/>
-              </a:spcAft>
-            </a:pPr>
-            <a:r>
-              <a:rPr sz="2000" b="1">
-                <a:solidFill>
-                  <a:srgbClr val="F59E0B"/>
-                </a:solidFill>
-                <a:latin typeface="Calibri"/>
-              </a:rPr>
-              <a:t>3.  </a:t>
-            </a:r>
-            <a:r>
-              <a:rPr sz="1600">
-                <a:solidFill>
-                  <a:srgbClr val="0F2040"/>
-                </a:solidFill>
-                <a:latin typeface="Calibri"/>
-              </a:rPr>
-              <a:t>Haz clic en la OT para abrir el detalle</a:t>
-            </a:r>
-          </a:p>
-          <a:p>
-            <a:pPr algn="l">
-              <a:lnSpc>
-                <a:spcPct val="150000"/>
-              </a:lnSpc>
-              <a:spcAft>
-                <a:spcPts val="1000"/>
-              </a:spcAft>
-            </a:pPr>
-            <a:r>
-              <a:rPr sz="2000" b="1">
-                <a:solidFill>
-                  <a:srgbClr val="F59E0B"/>
-                </a:solidFill>
-                <a:latin typeface="Calibri"/>
-              </a:rPr>
-              <a:t>4.  </a:t>
-            </a:r>
-            <a:r>
-              <a:rPr sz="1600">
-                <a:solidFill>
-                  <a:srgbClr val="0F2040"/>
-                </a:solidFill>
-                <a:latin typeface="Calibri"/>
-              </a:rPr>
-              <a:t>Actualiza el porcentaje de progreso (0-100%)</a:t>
-            </a:r>
-          </a:p>
-          <a:p>
-            <a:pPr algn="l">
-              <a:lnSpc>
-                <a:spcPct val="150000"/>
-              </a:lnSpc>
-              <a:spcAft>
-                <a:spcPts val="1000"/>
-              </a:spcAft>
-            </a:pPr>
-            <a:r>
-              <a:rPr sz="2000" b="1">
-                <a:solidFill>
-                  <a:srgbClr val="F59E0B"/>
-                </a:solidFill>
-                <a:latin typeface="Calibri"/>
-              </a:rPr>
-              <a:t>5.  </a:t>
-            </a:r>
-            <a:r>
-              <a:rPr sz="1600">
-                <a:solidFill>
-                  <a:srgbClr val="0F2040"/>
-                </a:solidFill>
-                <a:latin typeface="Calibri"/>
-              </a:rPr>
-              <a:t>Cambia el estado si es necesario (En Progreso → Completado)</a:t>
-            </a:r>
-          </a:p>
-          <a:p>
-            <a:pPr algn="l">
-              <a:lnSpc>
-                <a:spcPct val="150000"/>
-              </a:lnSpc>
-              <a:spcAft>
-                <a:spcPts val="1000"/>
-              </a:spcAft>
-            </a:pPr>
-            <a:r>
-              <a:rPr sz="2000" b="1">
-                <a:solidFill>
-                  <a:srgbClr val="F59E0B"/>
-                </a:solidFill>
-                <a:latin typeface="Calibri"/>
-              </a:rPr>
-              <a:t>6.  </a:t>
-            </a:r>
-            <a:r>
-              <a:rPr sz="1600">
-                <a:solidFill>
-                  <a:srgbClr val="0F2040"/>
-                </a:solidFill>
-                <a:latin typeface="Calibri"/>
-              </a:rPr>
-              <a:t>Cuando llegues a 100%, marca como "Completado"</a:t>
-            </a:r>
-          </a:p>
-          <a:p>
-            <a:pPr algn="l">
-              <a:lnSpc>
-                <a:spcPct val="150000"/>
-              </a:lnSpc>
-              <a:spcAft>
-                <a:spcPts val="1000"/>
-              </a:spcAft>
-            </a:pPr>
-            <a:r>
-              <a:rPr sz="2000" b="1">
-                <a:solidFill>
-                  <a:srgbClr val="F59E0B"/>
-                </a:solidFill>
-                <a:latin typeface="Calibri"/>
-              </a:rPr>
-              <a:t>7.  </a:t>
-            </a:r>
-            <a:r>
-              <a:rPr sz="1600">
-                <a:solidFill>
-                  <a:srgbClr val="0F2040"/>
-                </a:solidFill>
-                <a:latin typeface="Calibri"/>
-              </a:rPr>
-              <a:t>La OT pasará automáticamente al supervisor/admin para aprobación</a:t>
+              <a:t>Módulo de Manuales — descarga el manual y tu capacitación</a:t>
             </a:r>
           </a:p>
         </p:txBody>
@@ -6230,7 +5368,7 @@
                 </a:solidFill>
                 <a:latin typeface="Calibri"/>
               </a:rPr>
-              <a:t>Flujo: Crear Solicitud de Compra</a:t>
+              <a:t>No ves Aprobaciones OT</a:t>
             </a:r>
           </a:p>
         </p:txBody>
@@ -6272,246 +5410,20 @@
       </p:sp>
       <p:sp>
         <p:nvSpPr>
-          <p:cNvPr id="5" name="TextBox 4"/>
-          <p:cNvSpPr txBox="1"/>
-          <p:nvPr/>
-        </p:nvSpPr>
-        <p:spPr>
-          <a:xfrm>
-            <a:off x="457200" y="1005840"/>
-            <a:ext cx="11247120" cy="548640"/>
-          </a:xfrm>
-          <a:prstGeom prst="rect">
-            <a:avLst/>
-          </a:prstGeom>
-          <a:noFill/>
-        </p:spPr>
-        <p:txBody>
-          <a:bodyPr wrap="square" anchor="t" lIns="45720" rIns="45720">
-            <a:spAutoFit/>
-          </a:bodyPr>
-          <a:lstStyle/>
-          <a:p>
-            <a:pPr algn="l"/>
-            <a:r>
-              <a:rPr sz="1400" b="0">
-                <a:solidFill>
-                  <a:srgbClr val="666666"/>
-                </a:solidFill>
-                <a:latin typeface="Calibri"/>
-              </a:rPr>
-              <a:t>Si necesitas materiales para una OT, puedes solicitarlos:</a:t>
-            </a:r>
-          </a:p>
-        </p:txBody>
-      </p:sp>
-      <p:sp>
-        <p:nvSpPr>
-          <p:cNvPr id="6" name="TextBox 5"/>
-          <p:cNvSpPr txBox="1"/>
-          <p:nvPr/>
-        </p:nvSpPr>
-        <p:spPr>
-          <a:xfrm>
-            <a:off x="640080" y="1645920"/>
-            <a:ext cx="10972800" cy="4572000"/>
-          </a:xfrm>
-          <a:prstGeom prst="rect">
-            <a:avLst/>
-          </a:prstGeom>
-          <a:noFill/>
-        </p:spPr>
-        <p:txBody>
-          <a:bodyPr wrap="square">
-            <a:spAutoFit/>
-          </a:bodyPr>
-          <a:lstStyle/>
-          <a:p>
-            <a:pPr algn="l">
-              <a:lnSpc>
-                <a:spcPct val="150000"/>
-              </a:lnSpc>
-              <a:spcAft>
-                <a:spcPts val="1000"/>
-              </a:spcAft>
-            </a:pPr>
-            <a:r>
-              <a:rPr sz="2000" b="1">
-                <a:solidFill>
-                  <a:srgbClr val="F59E0B"/>
-                </a:solidFill>
-                <a:latin typeface="Calibri"/>
-              </a:rPr>
-              <a:t>1.  </a:t>
-            </a:r>
-            <a:r>
-              <a:rPr sz="1600">
-                <a:solidFill>
-                  <a:srgbClr val="0F2040"/>
-                </a:solidFill>
-                <a:latin typeface="Calibri"/>
-              </a:rPr>
-              <a:t>Ve a Solicitud de Compras → "Nueva Solicitud"</a:t>
-            </a:r>
-          </a:p>
-          <a:p>
-            <a:pPr algn="l">
-              <a:lnSpc>
-                <a:spcPct val="150000"/>
-              </a:lnSpc>
-              <a:spcAft>
-                <a:spcPts val="1000"/>
-              </a:spcAft>
-            </a:pPr>
-            <a:r>
-              <a:rPr sz="2000" b="1">
-                <a:solidFill>
-                  <a:srgbClr val="F59E0B"/>
-                </a:solidFill>
-                <a:latin typeface="Calibri"/>
-              </a:rPr>
-              <a:t>2.  </a:t>
-            </a:r>
-            <a:r>
-              <a:rPr sz="1600">
-                <a:solidFill>
-                  <a:srgbClr val="0F2040"/>
-                </a:solidFill>
-                <a:latin typeface="Calibri"/>
-              </a:rPr>
-              <a:t>Indica: título, descripción, prioridad</a:t>
-            </a:r>
-          </a:p>
-          <a:p>
-            <a:pPr algn="l">
-              <a:lnSpc>
-                <a:spcPct val="150000"/>
-              </a:lnSpc>
-              <a:spcAft>
-                <a:spcPts val="1000"/>
-              </a:spcAft>
-            </a:pPr>
-            <a:r>
-              <a:rPr sz="2000" b="1">
-                <a:solidFill>
-                  <a:srgbClr val="F59E0B"/>
-                </a:solidFill>
-                <a:latin typeface="Calibri"/>
-              </a:rPr>
-              <a:t>3.  </a:t>
-            </a:r>
-            <a:r>
-              <a:rPr sz="1600">
-                <a:solidFill>
-                  <a:srgbClr val="0F2040"/>
-                </a:solidFill>
-                <a:latin typeface="Calibri"/>
-              </a:rPr>
-              <a:t>Agrega los materiales con cantidades y precios estimados</a:t>
-            </a:r>
-          </a:p>
-          <a:p>
-            <a:pPr algn="l">
-              <a:lnSpc>
-                <a:spcPct val="150000"/>
-              </a:lnSpc>
-              <a:spcAft>
-                <a:spcPts val="1000"/>
-              </a:spcAft>
-            </a:pPr>
-            <a:r>
-              <a:rPr sz="2000" b="1">
-                <a:solidFill>
-                  <a:srgbClr val="F59E0B"/>
-                </a:solidFill>
-                <a:latin typeface="Calibri"/>
-              </a:rPr>
-              <a:t>4.  </a:t>
-            </a:r>
-            <a:r>
-              <a:rPr sz="1600">
-                <a:solidFill>
-                  <a:srgbClr val="0F2040"/>
-                </a:solidFill>
-                <a:latin typeface="Calibri"/>
-              </a:rPr>
-              <a:t>Guarda → tu supervisor revisará la solicitud</a:t>
-            </a:r>
-          </a:p>
-          <a:p>
-            <a:pPr algn="l">
-              <a:lnSpc>
-                <a:spcPct val="150000"/>
-              </a:lnSpc>
-              <a:spcAft>
-                <a:spcPts val="1000"/>
-              </a:spcAft>
-            </a:pPr>
-            <a:r>
-              <a:rPr sz="2000" b="1">
-                <a:solidFill>
-                  <a:srgbClr val="F59E0B"/>
-                </a:solidFill>
-                <a:latin typeface="Calibri"/>
-              </a:rPr>
-              <a:t>5.  </a:t>
-            </a:r>
-            <a:r>
-              <a:rPr sz="1600">
-                <a:solidFill>
-                  <a:srgbClr val="0F2040"/>
-                </a:solidFill>
-                <a:latin typeface="Calibri"/>
-              </a:rPr>
-              <a:t>Recibirás notificación cuando sea aprobada/rechazada</a:t>
-            </a:r>
-          </a:p>
-          <a:p>
-            <a:pPr algn="l">
-              <a:lnSpc>
-                <a:spcPct val="150000"/>
-              </a:lnSpc>
-              <a:spcAft>
-                <a:spcPts val="1000"/>
-              </a:spcAft>
-            </a:pPr>
-            <a:r>
-              <a:rPr sz="2000" b="1">
-                <a:solidFill>
-                  <a:srgbClr val="F59E0B"/>
-                </a:solidFill>
-                <a:latin typeface="Calibri"/>
-              </a:rPr>
-              <a:t>6.  </a:t>
-            </a:r>
-            <a:r>
-              <a:rPr sz="1600">
-                <a:solidFill>
-                  <a:srgbClr val="0F2040"/>
-                </a:solidFill>
-                <a:latin typeface="Calibri"/>
-              </a:rPr>
-              <a:t>Solo verás las SC que tú creaste (no las de otros)</a:t>
-            </a:r>
-          </a:p>
-        </p:txBody>
-      </p:sp>
-      <p:sp>
-        <p:nvSpPr>
-          <p:cNvPr id="7" name="Rectangle 6"/>
+          <p:cNvPr id="5" name="Rounded Rectangle 4"/>
           <p:cNvSpPr/>
           <p:nvPr/>
         </p:nvSpPr>
         <p:spPr>
           <a:xfrm>
-            <a:off x="0" y="6583680"/>
-            <a:ext cx="12191695" cy="274320"/>
-          </a:xfrm>
-          <a:prstGeom prst="rect">
+            <a:off x="914400" y="1828800"/>
+            <a:ext cx="10332720" cy="3200400"/>
+          </a:xfrm>
+          <a:prstGeom prst="roundRect">
             <a:avLst/>
           </a:prstGeom>
           <a:solidFill>
-            <a:srgbClr val="0F2040"/>
+            <a:srgbClr val="F1F5F9"/>
           </a:solidFill>
           <a:ln>
             <a:noFill/>
@@ -6542,14 +5454,58 @@
       </p:sp>
       <p:sp>
         <p:nvSpPr>
-          <p:cNvPr id="8" name="TextBox 7"/>
+          <p:cNvPr id="6" name="Rectangle 5"/>
+          <p:cNvSpPr/>
+          <p:nvPr/>
+        </p:nvSpPr>
+        <p:spPr>
+          <a:xfrm>
+            <a:off x="914400" y="1828800"/>
+            <a:ext cx="137160" cy="3200400"/>
+          </a:xfrm>
+          <a:prstGeom prst="rect">
+            <a:avLst/>
+          </a:prstGeom>
+          <a:solidFill>
+            <a:srgbClr val="0369A1"/>
+          </a:solidFill>
+          <a:ln>
+            <a:noFill/>
+          </a:ln>
+          <a:effectLst/>
+        </p:spPr>
+        <p:style>
+          <a:lnRef idx="1">
+            <a:schemeClr val="accent1"/>
+          </a:lnRef>
+          <a:fillRef idx="3">
+            <a:schemeClr val="accent1"/>
+          </a:fillRef>
+          <a:effectRef idx="2">
+            <a:schemeClr val="accent1"/>
+          </a:effectRef>
+          <a:fontRef idx="minor">
+            <a:schemeClr val="lt1"/>
+          </a:fontRef>
+        </p:style>
+        <p:txBody>
+          <a:bodyPr rtlCol="0" anchor="ctr"/>
+          <a:lstStyle/>
+          <a:p>
+            <a:pPr algn="ctr"/>
+          </a:p>
+        </p:txBody>
+      </p:sp>
+      <p:sp>
+        <p:nvSpPr>
+          <p:cNvPr id="7" name="TextBox 6"/>
           <p:cNvSpPr txBox="1"/>
           <p:nvPr/>
         </p:nvSpPr>
         <p:spPr>
           <a:xfrm>
-            <a:off x="365760" y="6583680"/>
-            <a:ext cx="6400800" cy="274320"/>
+            <a:off x="1371600" y="2103120"/>
+            <a:ext cx="1828800" cy="1828800"/>
           </a:xfrm>
           <a:prstGeom prst="rect">
             <a:avLst/>
@@ -6562,8 +5518,122 @@
           </a:bodyPr>
           <a:lstStyle/>
           <a:p>
+            <a:pPr algn="ctr"/>
+            <a:r>
+              <a:rPr sz="8000" b="0">
+                <a:solidFill>
+                  <a:srgbClr val="0369A1"/>
+                </a:solidFill>
+                <a:latin typeface="Calibri"/>
+              </a:rPr>
+              <a:t>ℹ️</a:t>
+            </a:r>
+          </a:p>
+        </p:txBody>
+      </p:sp>
+      <p:sp>
+        <p:nvSpPr>
+          <p:cNvPr id="8" name="TextBox 7"/>
+          <p:cNvSpPr txBox="1"/>
+          <p:nvPr/>
+        </p:nvSpPr>
+        <p:spPr>
+          <a:xfrm>
+            <a:off x="3474720" y="2103120"/>
+            <a:ext cx="7498079" cy="2743200"/>
+          </a:xfrm>
+          <a:prstGeom prst="rect">
+            <a:avLst/>
+          </a:prstGeom>
+          <a:noFill/>
+        </p:spPr>
+        <p:txBody>
+          <a:bodyPr wrap="square" anchor="ctr" lIns="45720" rIns="45720">
+            <a:spAutoFit/>
+          </a:bodyPr>
+          <a:lstStyle/>
+          <a:p>
             <a:pPr algn="l"/>
             <a:r>
+              <a:rPr sz="1800" b="0">
+                <a:solidFill>
+                  <a:srgbClr val="0F2040"/>
+                </a:solidFill>
+                <a:latin typeface="Calibri"/>
+              </a:rPr>
+              <a:t>El módulo "Aprobaciones OT" NO está disponible para tu rol. Tú completas las OT pero no las apruebas. La aprobación la hace el supervisor o administrador después de que tú marcas la OT como completada.</a:t>
+            </a:r>
+          </a:p>
+        </p:txBody>
+      </p:sp>
+      <p:sp>
+        <p:nvSpPr>
+          <p:cNvPr id="9" name="Rectangle 8"/>
+          <p:cNvSpPr/>
+          <p:nvPr/>
+        </p:nvSpPr>
+        <p:spPr>
+          <a:xfrm>
+            <a:off x="0" y="6583680"/>
+            <a:ext cx="12191695" cy="274320"/>
+          </a:xfrm>
+          <a:prstGeom prst="rect">
+            <a:avLst/>
+          </a:prstGeom>
+          <a:solidFill>
+            <a:srgbClr val="0F2040"/>
+          </a:solidFill>
+          <a:ln>
+            <a:noFill/>
+          </a:ln>
+          <a:effectLst/>
+        </p:spPr>
+        <p:style>
+          <a:lnRef idx="1">
+            <a:schemeClr val="accent1"/>
+          </a:lnRef>
+          <a:fillRef idx="3">
+            <a:schemeClr val="accent1"/>
+          </a:fillRef>
+          <a:effectRef idx="2">
+            <a:schemeClr val="accent1"/>
+          </a:effectRef>
+          <a:fontRef idx="minor">
+            <a:schemeClr val="lt1"/>
+          </a:fontRef>
+        </p:style>
+        <p:txBody>
+          <a:bodyPr rtlCol="0" anchor="ctr"/>
+          <a:lstStyle/>
+          <a:p>
+            <a:pPr algn="ctr"/>
+          </a:p>
+        </p:txBody>
+      </p:sp>
+      <p:sp>
+        <p:nvSpPr>
+          <p:cNvPr id="10" name="TextBox 9"/>
+          <p:cNvSpPr txBox="1"/>
+          <p:nvPr/>
+        </p:nvSpPr>
+        <p:spPr>
+          <a:xfrm>
+            <a:off x="365760" y="6583680"/>
+            <a:ext cx="6400800" cy="274320"/>
+          </a:xfrm>
+          <a:prstGeom prst="rect">
+            <a:avLst/>
+          </a:prstGeom>
+          <a:noFill/>
+        </p:spPr>
+        <p:txBody>
+          <a:bodyPr wrap="square" anchor="ctr" lIns="45720" rIns="45720">
+            <a:spAutoFit/>
+          </a:bodyPr>
+          <a:lstStyle/>
+          <a:p>
+            <a:pPr algn="l"/>
+            <a:r>
               <a:rPr sz="900" b="0">
                 <a:solidFill>
                   <a:srgbClr val="FFFFFF"/>
@@ -6577,7 +5647,7 @@
       </p:sp>
       <p:sp>
         <p:nvSpPr>
-          <p:cNvPr id="9" name="TextBox 8"/>
+          <p:cNvPr id="11" name="TextBox 10"/>
           <p:cNvSpPr txBox="1"/>
           <p:nvPr/>
         </p:nvSpPr>
@@ -6710,7 +5780,7 @@
                 </a:solidFill>
                 <a:latin typeface="Calibri"/>
               </a:rPr>
-              <a:t>Consultar manuales de herramientas</a:t>
+              <a:t>Datos de Acceso</a:t>
             </a:r>
           </a:p>
         </p:txBody>
@@ -6752,20 +5822,208 @@
       </p:sp>
       <p:sp>
         <p:nvSpPr>
-          <p:cNvPr id="5" name="Rounded Rectangle 4"/>
+          <p:cNvPr id="5" name="TextBox 4"/>
+          <p:cNvSpPr txBox="1"/>
+          <p:nvPr/>
+        </p:nvSpPr>
+        <p:spPr>
+          <a:xfrm>
+            <a:off x="457200" y="1005840"/>
+            <a:ext cx="11247120" cy="731520"/>
+          </a:xfrm>
+          <a:prstGeom prst="rect">
+            <a:avLst/>
+          </a:prstGeom>
+          <a:noFill/>
+        </p:spPr>
+        <p:txBody>
+          <a:bodyPr wrap="square" anchor="t" lIns="45720" rIns="45720">
+            <a:spAutoFit/>
+          </a:bodyPr>
+          <a:lstStyle/>
+          <a:p>
+            <a:pPr algn="l"/>
+            <a:r>
+              <a:rPr sz="1400" b="0">
+                <a:solidFill>
+                  <a:srgbClr val="666666"/>
+                </a:solidFill>
+                <a:latin typeface="Calibri"/>
+              </a:rPr>
+              <a:t>Credenciales de prueba:</a:t>
+            </a:r>
+          </a:p>
+        </p:txBody>
+      </p:sp>
+      <p:sp>
+        <p:nvSpPr>
+          <p:cNvPr id="6" name="TextBox 5"/>
+          <p:cNvSpPr txBox="1"/>
+          <p:nvPr/>
+        </p:nvSpPr>
+        <p:spPr>
+          <a:xfrm>
+            <a:off x="640080" y="1828800"/>
+            <a:ext cx="10972800" cy="4572000"/>
+          </a:xfrm>
+          <a:prstGeom prst="rect">
+            <a:avLst/>
+          </a:prstGeom>
+          <a:noFill/>
+        </p:spPr>
+        <p:txBody>
+          <a:bodyPr wrap="square">
+            <a:spAutoFit/>
+          </a:bodyPr>
+          <a:lstStyle/>
+          <a:p>
+            <a:pPr algn="l">
+              <a:lnSpc>
+                <a:spcPct val="140000"/>
+              </a:lnSpc>
+              <a:spcAft>
+                <a:spcPts val="800"/>
+              </a:spcAft>
+            </a:pPr>
+            <a:r>
+              <a:rPr sz="1600" b="1">
+                <a:solidFill>
+                  <a:srgbClr val="F59E0B"/>
+                </a:solidFill>
+              </a:rPr>
+              <a:t>● </a:t>
+            </a:r>
+            <a:r>
+              <a:rPr sz="1600">
+                <a:solidFill>
+                  <a:srgbClr val="0F2040"/>
+                </a:solidFill>
+              </a:rPr>
+              <a:t>URL: https://condominios-cyj.vercel.app</a:t>
+            </a:r>
+          </a:p>
+          <a:p>
+            <a:pPr algn="l">
+              <a:lnSpc>
+                <a:spcPct val="140000"/>
+              </a:lnSpc>
+              <a:spcAft>
+                <a:spcPts val="800"/>
+              </a:spcAft>
+            </a:pPr>
+            <a:r>
+              <a:rPr sz="1600" b="1">
+                <a:solidFill>
+                  <a:srgbClr val="F59E0B"/>
+                </a:solidFill>
+              </a:rPr>
+              <a:t>● </a:t>
+            </a:r>
+            <a:r>
+              <a:rPr sz="1600">
+                <a:solidFill>
+                  <a:srgbClr val="0F2040"/>
+                </a:solidFill>
+              </a:rPr>
+              <a:t>Email: personal.test@cyj.cl</a:t>
+            </a:r>
+          </a:p>
+          <a:p>
+            <a:pPr algn="l">
+              <a:lnSpc>
+                <a:spcPct val="140000"/>
+              </a:lnSpc>
+              <a:spcAft>
+                <a:spcPts val="800"/>
+              </a:spcAft>
+            </a:pPr>
+            <a:r>
+              <a:rPr sz="1600" b="1">
+                <a:solidFill>
+                  <a:srgbClr val="F59E0B"/>
+                </a:solidFill>
+              </a:rPr>
+              <a:t>● </a:t>
+            </a:r>
+            <a:r>
+              <a:rPr sz="1600">
+                <a:solidFill>
+                  <a:srgbClr val="0F2040"/>
+                </a:solidFill>
+              </a:rPr>
+              <a:t>Contraseña temporal: Personal2026!</a:t>
+            </a:r>
+          </a:p>
+          <a:p>
+            <a:pPr algn="l">
+              <a:lnSpc>
+                <a:spcPct val="140000"/>
+              </a:lnSpc>
+              <a:spcAft>
+                <a:spcPts val="800"/>
+              </a:spcAft>
+            </a:pPr>
+            <a:r>
+              <a:rPr sz="1600" b="1">
+                <a:solidFill>
+                  <a:srgbClr val="F59E0B"/>
+                </a:solidFill>
+              </a:rPr>
+              <a:t>● </a:t>
+            </a:r>
+            <a:r>
+              <a:rPr sz="1600">
+                <a:solidFill>
+                  <a:srgbClr val="0F2040"/>
+                </a:solidFill>
+              </a:rPr>
+              <a:t>Deberás cambiar la contraseña en el primer login</a:t>
+            </a:r>
+          </a:p>
+          <a:p>
+            <a:pPr algn="l">
+              <a:lnSpc>
+                <a:spcPct val="140000"/>
+              </a:lnSpc>
+              <a:spcAft>
+                <a:spcPts val="800"/>
+              </a:spcAft>
+            </a:pPr>
+            <a:r>
+              <a:rPr sz="1600" b="1">
+                <a:solidFill>
+                  <a:srgbClr val="F59E0B"/>
+                </a:solidFill>
+              </a:rPr>
+              <a:t>● </a:t>
+            </a:r>
+            <a:r>
+              <a:rPr sz="1600">
+                <a:solidFill>
+                  <a:srgbClr val="0F2040"/>
+                </a:solidFill>
+              </a:rPr>
+              <a:t>Página de inicio: /sistema (dashboard simplificado)</a:t>
+            </a:r>
+          </a:p>
+        </p:txBody>
+      </p:sp>
+      <p:sp>
+        <p:nvSpPr>
+          <p:cNvPr id="7" name="Rectangle 6"/>
           <p:cNvSpPr/>
           <p:nvPr/>
         </p:nvSpPr>
         <p:spPr>
           <a:xfrm>
-            <a:off x="914400" y="1828800"/>
-            <a:ext cx="10332720" cy="3200400"/>
-          </a:xfrm>
-          <a:prstGeom prst="roundRect">
+            <a:off x="0" y="6583680"/>
+            <a:ext cx="12191695" cy="274320"/>
+          </a:xfrm>
+          <a:prstGeom prst="rect">
             <a:avLst/>
           </a:prstGeom>
           <a:solidFill>
-            <a:srgbClr val="F1F5F9"/>
+            <a:srgbClr val="0F2040"/>
           </a:solidFill>
           <a:ln>
             <a:noFill/>
@@ -6796,20 +6054,116 @@
       </p:sp>
       <p:sp>
         <p:nvSpPr>
-          <p:cNvPr id="6" name="Rectangle 5"/>
+          <p:cNvPr id="8" name="TextBox 7"/>
+          <p:cNvSpPr txBox="1"/>
+          <p:nvPr/>
+        </p:nvSpPr>
+        <p:spPr>
+          <a:xfrm>
+            <a:off x="365760" y="6583680"/>
+            <a:ext cx="6400800" cy="274320"/>
+          </a:xfrm>
+          <a:prstGeom prst="rect">
+            <a:avLst/>
+          </a:prstGeom>
+          <a:noFill/>
+        </p:spPr>
+        <p:txBody>
+          <a:bodyPr wrap="square" anchor="ctr" lIns="45720" rIns="45720">
+            <a:spAutoFit/>
+          </a:bodyPr>
+          <a:lstStyle/>
+          <a:p>
+            <a:pPr algn="l"/>
+            <a:r>
+              <a:rPr sz="900" b="0">
+                <a:solidFill>
+                  <a:srgbClr val="FFFFFF"/>
+                </a:solidFill>
+                <a:latin typeface="Calibri"/>
+              </a:rPr>
+              <a:t>Asesorías Integrales CyJ · Capacitación Personal</a:t>
+            </a:r>
+          </a:p>
+        </p:txBody>
+      </p:sp>
+      <p:sp>
+        <p:nvSpPr>
+          <p:cNvPr id="9" name="TextBox 8"/>
+          <p:cNvSpPr txBox="1"/>
+          <p:nvPr/>
+        </p:nvSpPr>
+        <p:spPr>
+          <a:xfrm>
+            <a:off x="7315200" y="6583680"/>
+            <a:ext cx="4572000" cy="274320"/>
+          </a:xfrm>
+          <a:prstGeom prst="rect">
+            <a:avLst/>
+          </a:prstGeom>
+          <a:noFill/>
+        </p:spPr>
+        <p:txBody>
+          <a:bodyPr wrap="square" anchor="ctr" lIns="45720" rIns="45720">
+            <a:spAutoFit/>
+          </a:bodyPr>
+          <a:lstStyle/>
+          <a:p>
+            <a:pPr algn="r"/>
+            <a:r>
+              <a:rPr sz="900" b="0">
+                <a:solidFill>
+                  <a:srgbClr val="F59E0B"/>
+                </a:solidFill>
+                <a:latin typeface="Calibri"/>
+              </a:rPr>
+              <a:t>https://condominios-cyj.vercel.app</a:t>
+            </a:r>
+          </a:p>
+        </p:txBody>
+      </p:sp>
+    </p:spTree>
+  </p:cSld>
+  <p:clrMapOvr>
+    <a:masterClrMapping/>
+  </p:clrMapOvr>
+</p:sld>
+</file>
+
+<file path=ppt/slides/slide9.xml><?xml version="1.0" encoding="utf-8"?>
+<p:sld xmlns:a="http://schemas.openxmlformats.org/drawingml/2006/main" xmlns:p="http://schemas.openxmlformats.org/presentationml/2006/main" xmlns:r="http://schemas.openxmlformats.org/officeDocument/2006/relationships">
+  <p:cSld>
+    <p:bg>
+      <p:bgPr>
+        <a:solidFill>
+          <a:srgbClr val="0A1172"/>
+        </a:solidFill>
+        <a:effectLst/>
+      </p:bgPr>
+    </p:bg>
+    <p:spTree>
+      <p:nvGrpSpPr>
+        <p:cNvPr id="1" name=""/>
+        <p:cNvGrpSpPr/>
+        <p:nvPr/>
+      </p:nvGrpSpPr>
+      <p:grpSpPr/>
+      <p:sp>
+        <p:nvSpPr>
+          <p:cNvPr id="2" name="Rectangle 1"/>
           <p:cNvSpPr/>
           <p:nvPr/>
         </p:nvSpPr>
         <p:spPr>
           <a:xfrm>
-            <a:off x="914400" y="1828800"/>
-            <a:ext cx="137160" cy="3200400"/>
+            <a:off x="0" y="0"/>
+            <a:ext cx="365760" cy="6858000"/>
           </a:xfrm>
           <a:prstGeom prst="rect">
             <a:avLst/>
           </a:prstGeom>
           <a:solidFill>
-            <a:srgbClr val="16A34A"/>
+            <a:srgbClr val="F59E0B"/>
           </a:solidFill>
           <a:ln>
             <a:noFill/>
@@ -6840,14 +6194,14 @@
       </p:sp>
       <p:sp>
         <p:nvSpPr>
-          <p:cNvPr id="7" name="TextBox 6"/>
+          <p:cNvPr id="3" name="TextBox 2"/>
           <p:cNvSpPr txBox="1"/>
           <p:nvPr/>
         </p:nvSpPr>
         <p:spPr>
           <a:xfrm>
-            <a:off x="1371600" y="2103120"/>
-            <a:ext cx="1828800" cy="1828800"/>
+            <a:off x="731520" y="2286000"/>
+            <a:ext cx="10698480" cy="914400"/>
           </a:xfrm>
           <a:prstGeom prst="rect">
             <a:avLst/>
@@ -6862,27 +6216,27 @@
           <a:p>
             <a:pPr algn="ctr"/>
             <a:r>
-              <a:rPr sz="8000" b="0">
-                <a:solidFill>
-                  <a:srgbClr val="16A34A"/>
+              <a:rPr sz="7200" b="1">
+                <a:solidFill>
+                  <a:srgbClr val="FFFFFF"/>
                 </a:solidFill>
                 <a:latin typeface="Calibri"/>
               </a:rPr>
-              <a:t>✓</a:t>
-            </a:r>
-          </a:p>
-        </p:txBody>
-      </p:sp>
-      <p:sp>
-        <p:nvSpPr>
-          <p:cNvPr id="8" name="TextBox 7"/>
+              <a:t>¡Listo!</a:t>
+            </a:r>
+          </a:p>
+        </p:txBody>
+      </p:sp>
+      <p:sp>
+        <p:nvSpPr>
+          <p:cNvPr id="4" name="TextBox 3"/>
           <p:cNvSpPr txBox="1"/>
           <p:nvPr/>
         </p:nvSpPr>
         <p:spPr>
           <a:xfrm>
-            <a:off x="3474720" y="2103120"/>
-            <a:ext cx="7498079" cy="2743200"/>
+            <a:off x="731520" y="3474720"/>
+            <a:ext cx="10698480" cy="640080"/>
           </a:xfrm>
           <a:prstGeom prst="rect">
             <a:avLst/>
@@ -6890,78 +6244,34 @@
           <a:noFill/>
         </p:spPr>
         <p:txBody>
-          <a:bodyPr wrap="square" anchor="ctr" lIns="45720" rIns="45720">
+          <a:bodyPr wrap="square" anchor="t" lIns="45720" rIns="45720">
             <a:spAutoFit/>
           </a:bodyPr>
           <a:lstStyle/>
           <a:p>
-            <a:pPr algn="l"/>
-            <a:r>
-              <a:rPr sz="1800" b="0">
-                <a:solidFill>
-                  <a:srgbClr val="0F2040"/>
+            <a:pPr algn="ctr"/>
+            <a:r>
+              <a:rPr sz="2200" b="0">
+                <a:solidFill>
+                  <a:srgbClr val="F1F5F9"/>
                 </a:solidFill>
                 <a:latin typeface="Calibri"/>
               </a:rPr>
-              <a:t>En el módulo Herramientas puedes consultar los manuales de uso de cada herramienta antes de utilizarla. Esto es importante para tu seguridad y para el correcto uso del equipo. Si una herramienta no tiene manual cargado, avisa al administrador.</a:t>
-            </a:r>
-          </a:p>
-        </p:txBody>
-      </p:sp>
-      <p:sp>
-        <p:nvSpPr>
-          <p:cNvPr id="9" name="Rectangle 8"/>
-          <p:cNvSpPr/>
-          <p:nvPr/>
-        </p:nvSpPr>
-        <p:spPr>
-          <a:xfrm>
-            <a:off x="0" y="6583680"/>
-            <a:ext cx="12191695" cy="274320"/>
-          </a:xfrm>
-          <a:prstGeom prst="rect">
-            <a:avLst/>
-          </a:prstGeom>
-          <a:solidFill>
-            <a:srgbClr val="0F2040"/>
-          </a:solidFill>
-          <a:ln>
-            <a:noFill/>
-          </a:ln>
-          <a:effectLst/>
-        </p:spPr>
-        <p:style>
-          <a:lnRef idx="1">
-            <a:schemeClr val="accent1"/>
-          </a:lnRef>
-          <a:fillRef idx="3">
-            <a:schemeClr val="accent1"/>
-          </a:fillRef>
-          <a:effectRef idx="2">
-            <a:schemeClr val="accent1"/>
-          </a:effectRef>
-          <a:fontRef idx="minor">
-            <a:schemeClr val="lt1"/>
-          </a:fontRef>
-        </p:style>
-        <p:txBody>
-          <a:bodyPr rtlCol="0" anchor="ctr"/>
-          <a:lstStyle/>
-          <a:p>
-            <a:pPr algn="ctr"/>
-          </a:p>
-        </p:txBody>
-      </p:sp>
-      <p:sp>
-        <p:nvSpPr>
-          <p:cNvPr id="10" name="TextBox 9"/>
+              <a:t>Ya puedes comenzar a usar el sistema como Personal</a:t>
+            </a:r>
+          </a:p>
+        </p:txBody>
+      </p:sp>
+      <p:sp>
+        <p:nvSpPr>
+          <p:cNvPr id="5" name="TextBox 4"/>
           <p:cNvSpPr txBox="1"/>
           <p:nvPr/>
         </p:nvSpPr>
         <p:spPr>
           <a:xfrm>
-            <a:off x="365760" y="6583680"/>
-            <a:ext cx="6400800" cy="274320"/>
+            <a:off x="731520" y="4754880"/>
+            <a:ext cx="10698480" cy="457200"/>
           </a:xfrm>
           <a:prstGeom prst="rect">
             <a:avLst/>
@@ -6969,34 +6279,34 @@
           <a:noFill/>
         </p:spPr>
         <p:txBody>
-          <a:bodyPr wrap="square" anchor="ctr" lIns="45720" rIns="45720">
+          <a:bodyPr wrap="square" anchor="t" lIns="45720" rIns="45720">
             <a:spAutoFit/>
           </a:bodyPr>
           <a:lstStyle/>
           <a:p>
-            <a:pPr algn="l"/>
-            <a:r>
-              <a:rPr sz="900" b="0">
-                <a:solidFill>
-                  <a:srgbClr val="FFFFFF"/>
+            <a:pPr algn="ctr"/>
+            <a:r>
+              <a:rPr sz="1400" b="0">
+                <a:solidFill>
+                  <a:srgbClr val="F59E0B"/>
                 </a:solidFill>
                 <a:latin typeface="Calibri"/>
               </a:rPr>
-              <a:t>Asesorías Integrales CyJ · Capacitación Personal</a:t>
-            </a:r>
-          </a:p>
-        </p:txBody>
-      </p:sp>
-      <p:sp>
-        <p:nvSpPr>
-          <p:cNvPr id="11" name="TextBox 10"/>
+              <a:t>Si tienes dudas, consulta el Manual de Usuario o contacta al administrador</a:t>
+            </a:r>
+          </a:p>
+        </p:txBody>
+      </p:sp>
+      <p:sp>
+        <p:nvSpPr>
+          <p:cNvPr id="6" name="TextBox 5"/>
           <p:cNvSpPr txBox="1"/>
           <p:nvPr/>
         </p:nvSpPr>
         <p:spPr>
           <a:xfrm>
-            <a:off x="7315200" y="6583680"/>
-            <a:ext cx="4572000" cy="274320"/>
+            <a:off x="731520" y="5852160"/>
+            <a:ext cx="10698480" cy="457200"/>
           </a:xfrm>
           <a:prstGeom prst="rect">
             <a:avLst/>
@@ -7004,439 +6314,20 @@
           <a:noFill/>
         </p:spPr>
         <p:txBody>
-          <a:bodyPr wrap="square" anchor="ctr" lIns="45720" rIns="45720">
+          <a:bodyPr wrap="square" anchor="t" lIns="45720" rIns="45720">
             <a:spAutoFit/>
           </a:bodyPr>
           <a:lstStyle/>
           <a:p>
-            <a:pPr algn="r"/>
-            <a:r>
-              <a:rPr sz="900" b="0">
-                <a:solidFill>
-                  <a:srgbClr val="F59E0B"/>
+            <a:pPr algn="ctr"/>
+            <a:r>
+              <a:rPr sz="1400" b="1">
+                <a:solidFill>
+                  <a:srgbClr val="FFFFFF"/>
                 </a:solidFill>
                 <a:latin typeface="Calibri"/>
               </a:rPr>
-              <a:t>https://condominios-cyj.vercel.app</a:t>
-            </a:r>
-          </a:p>
-        </p:txBody>
-      </p:sp>
-    </p:spTree>
-  </p:cSld>
-  <p:clrMapOvr>
-    <a:masterClrMapping/>
-  </p:clrMapOvr>
-</p:sld>
-</file>
-
-<file path=ppt/slides/slide9.xml><?xml version="1.0" encoding="utf-8"?>
-<p:sld xmlns:a="http://schemas.openxmlformats.org/drawingml/2006/main" xmlns:p="http://schemas.openxmlformats.org/presentationml/2006/main" xmlns:r="http://schemas.openxmlformats.org/officeDocument/2006/relationships">
-  <p:cSld>
-    <p:bg>
-      <p:bgPr>
-        <a:solidFill>
-          <a:srgbClr val="FFFFFF"/>
-        </a:solidFill>
-        <a:effectLst/>
-      </p:bgPr>
-    </p:bg>
-    <p:spTree>
-      <p:nvGrpSpPr>
-        <p:cNvPr id="1" name=""/>
-        <p:cNvGrpSpPr/>
-        <p:nvPr/>
-      </p:nvGrpSpPr>
-      <p:grpSpPr/>
-      <p:sp>
-        <p:nvSpPr>
-          <p:cNvPr id="2" name="Rectangle 1"/>
-          <p:cNvSpPr/>
-          <p:nvPr/>
-        </p:nvSpPr>
-        <p:spPr>
-          <a:xfrm>
-            <a:off x="0" y="0"/>
-            <a:ext cx="12191695" cy="822960"/>
-          </a:xfrm>
-          <a:prstGeom prst="rect">
-            <a:avLst/>
-          </a:prstGeom>
-          <a:solidFill>
-            <a:srgbClr val="0A1172"/>
-          </a:solidFill>
-          <a:ln>
-            <a:noFill/>
-          </a:ln>
-          <a:effectLst/>
-        </p:spPr>
-        <p:style>
-          <a:lnRef idx="1">
-            <a:schemeClr val="accent1"/>
-          </a:lnRef>
-          <a:fillRef idx="3">
-            <a:schemeClr val="accent1"/>
-          </a:fillRef>
-          <a:effectRef idx="2">
-            <a:schemeClr val="accent1"/>
-          </a:effectRef>
-          <a:fontRef idx="minor">
-            <a:schemeClr val="lt1"/>
-          </a:fontRef>
-        </p:style>
-        <p:txBody>
-          <a:bodyPr rtlCol="0" anchor="ctr"/>
-          <a:lstStyle/>
-          <a:p>
-            <a:pPr algn="ctr"/>
-          </a:p>
-        </p:txBody>
-      </p:sp>
-      <p:sp>
-        <p:nvSpPr>
-          <p:cNvPr id="3" name="TextBox 2"/>
-          <p:cNvSpPr txBox="1"/>
-          <p:nvPr/>
-        </p:nvSpPr>
-        <p:spPr>
-          <a:xfrm>
-            <a:off x="365760" y="137160"/>
-            <a:ext cx="10058400" cy="548640"/>
-          </a:xfrm>
-          <a:prstGeom prst="rect">
-            <a:avLst/>
-          </a:prstGeom>
-          <a:noFill/>
-        </p:spPr>
-        <p:txBody>
-          <a:bodyPr wrap="square" anchor="ctr" lIns="45720" rIns="45720">
-            <a:spAutoFit/>
-          </a:bodyPr>
-          <a:lstStyle/>
-          <a:p>
-            <a:pPr algn="l"/>
-            <a:r>
-              <a:rPr sz="2200" b="1">
-                <a:solidFill>
-                  <a:srgbClr val="FFFFFF"/>
-                </a:solidFill>
-                <a:latin typeface="Calibri"/>
-              </a:rPr>
-              <a:t>No puedes hacer</a:t>
-            </a:r>
-          </a:p>
-        </p:txBody>
-      </p:sp>
-      <p:sp>
-        <p:nvSpPr>
-          <p:cNvPr id="4" name="TextBox 3"/>
-          <p:cNvSpPr txBox="1"/>
-          <p:nvPr/>
-        </p:nvSpPr>
-        <p:spPr>
-          <a:xfrm>
-            <a:off x="11247120" y="137160"/>
-            <a:ext cx="731520" cy="548640"/>
-          </a:xfrm>
-          <a:prstGeom prst="rect">
-            <a:avLst/>
-          </a:prstGeom>
-          <a:noFill/>
-        </p:spPr>
-        <p:txBody>
-          <a:bodyPr wrap="square" anchor="ctr" lIns="45720" rIns="45720">
-            <a:spAutoFit/>
-          </a:bodyPr>
-          <a:lstStyle/>
-          <a:p>
-            <a:pPr algn="r"/>
-            <a:r>
-              <a:rPr sz="1400" b="0">
-                <a:solidFill>
-                  <a:srgbClr val="F59E0B"/>
-                </a:solidFill>
-                <a:latin typeface="Calibri"/>
-              </a:rPr>
-              <a:t>9</a:t>
-            </a:r>
-          </a:p>
-        </p:txBody>
-      </p:sp>
-      <p:sp>
-        <p:nvSpPr>
-          <p:cNvPr id="5" name="Rounded Rectangle 4"/>
-          <p:cNvSpPr/>
-          <p:nvPr/>
-        </p:nvSpPr>
-        <p:spPr>
-          <a:xfrm>
-            <a:off x="914400" y="1828800"/>
-            <a:ext cx="10332720" cy="3200400"/>
-          </a:xfrm>
-          <a:prstGeom prst="roundRect">
-            <a:avLst/>
-          </a:prstGeom>
-          <a:solidFill>
-            <a:srgbClr val="F1F5F9"/>
-          </a:solidFill>
-          <a:ln>
-            <a:noFill/>
-          </a:ln>
-          <a:effectLst/>
-        </p:spPr>
-        <p:style>
-          <a:lnRef idx="1">
-            <a:schemeClr val="accent1"/>
-          </a:lnRef>
-          <a:fillRef idx="3">
-            <a:schemeClr val="accent1"/>
-          </a:fillRef>
-          <a:effectRef idx="2">
-            <a:schemeClr val="accent1"/>
-          </a:effectRef>
-          <a:fontRef idx="minor">
-            <a:schemeClr val="lt1"/>
-          </a:fontRef>
-        </p:style>
-        <p:txBody>
-          <a:bodyPr rtlCol="0" anchor="ctr"/>
-          <a:lstStyle/>
-          <a:p>
-            <a:pPr algn="ctr"/>
-          </a:p>
-        </p:txBody>
-      </p:sp>
-      <p:sp>
-        <p:nvSpPr>
-          <p:cNvPr id="6" name="Rectangle 5"/>
-          <p:cNvSpPr/>
-          <p:nvPr/>
-        </p:nvSpPr>
-        <p:spPr>
-          <a:xfrm>
-            <a:off x="914400" y="1828800"/>
-            <a:ext cx="137160" cy="3200400"/>
-          </a:xfrm>
-          <a:prstGeom prst="rect">
-            <a:avLst/>
-          </a:prstGeom>
-          <a:solidFill>
-            <a:srgbClr val="DC2626"/>
-          </a:solidFill>
-          <a:ln>
-            <a:noFill/>
-          </a:ln>
-          <a:effectLst/>
-        </p:spPr>
-        <p:style>
-          <a:lnRef idx="1">
-            <a:schemeClr val="accent1"/>
-          </a:lnRef>
-          <a:fillRef idx="3">
-            <a:schemeClr val="accent1"/>
-          </a:fillRef>
-          <a:effectRef idx="2">
-            <a:schemeClr val="accent1"/>
-          </a:effectRef>
-          <a:fontRef idx="minor">
-            <a:schemeClr val="lt1"/>
-          </a:fontRef>
-        </p:style>
-        <p:txBody>
-          <a:bodyPr rtlCol="0" anchor="ctr"/>
-          <a:lstStyle/>
-          <a:p>
-            <a:pPr algn="ctr"/>
-          </a:p>
-        </p:txBody>
-      </p:sp>
-      <p:sp>
-        <p:nvSpPr>
-          <p:cNvPr id="7" name="TextBox 6"/>
-          <p:cNvSpPr txBox="1"/>
-          <p:nvPr/>
-        </p:nvSpPr>
-        <p:spPr>
-          <a:xfrm>
-            <a:off x="1371600" y="2103120"/>
-            <a:ext cx="1828800" cy="1828800"/>
-          </a:xfrm>
-          <a:prstGeom prst="rect">
-            <a:avLst/>
-          </a:prstGeom>
-          <a:noFill/>
-        </p:spPr>
-        <p:txBody>
-          <a:bodyPr wrap="square" anchor="ctr" lIns="45720" rIns="45720">
-            <a:spAutoFit/>
-          </a:bodyPr>
-          <a:lstStyle/>
-          <a:p>
-            <a:pPr algn="ctr"/>
-            <a:r>
-              <a:rPr sz="8000" b="0">
-                <a:solidFill>
-                  <a:srgbClr val="DC2626"/>
-                </a:solidFill>
-                <a:latin typeface="Calibri"/>
-              </a:rPr>
-              <a:t>⛔</a:t>
-            </a:r>
-          </a:p>
-        </p:txBody>
-      </p:sp>
-      <p:sp>
-        <p:nvSpPr>
-          <p:cNvPr id="8" name="TextBox 7"/>
-          <p:cNvSpPr txBox="1"/>
-          <p:nvPr/>
-        </p:nvSpPr>
-        <p:spPr>
-          <a:xfrm>
-            <a:off x="3474720" y="2103120"/>
-            <a:ext cx="7498079" cy="2743200"/>
-          </a:xfrm>
-          <a:prstGeom prst="rect">
-            <a:avLst/>
-          </a:prstGeom>
-          <a:noFill/>
-        </p:spPr>
-        <p:txBody>
-          <a:bodyPr wrap="square" anchor="ctr" lIns="45720" rIns="45720">
-            <a:spAutoFit/>
-          </a:bodyPr>
-          <a:lstStyle/>
-          <a:p>
-            <a:pPr algn="l"/>
-            <a:r>
-              <a:rPr sz="1800" b="0">
-                <a:solidFill>
-                  <a:srgbClr val="0F2040"/>
-                </a:solidFill>
-                <a:latin typeface="Calibri"/>
-              </a:rPr>
-              <a:t>Limitaciones del rol Personal:
-✗ Ver OT de otros trabajadores (solo las asignadas a ti)
-✗ Crear o editar OT (solo actualizar progreso)
-✗ Eliminar OT o cualquier registro
-✗ Ver Aprobaciones OT, Personal, Proveedores, Proyectos
-✗ Ver Usuarios, Permisos, Auditoría, Respaldos
-✗ Aprobar Solicitudes de Compra
-✗ Exportar reportes</a:t>
-            </a:r>
-          </a:p>
-        </p:txBody>
-      </p:sp>
-      <p:sp>
-        <p:nvSpPr>
-          <p:cNvPr id="9" name="Rectangle 8"/>
-          <p:cNvSpPr/>
-          <p:nvPr/>
-        </p:nvSpPr>
-        <p:spPr>
-          <a:xfrm>
-            <a:off x="0" y="6583680"/>
-            <a:ext cx="12191695" cy="274320"/>
-          </a:xfrm>
-          <a:prstGeom prst="rect">
-            <a:avLst/>
-          </a:prstGeom>
-          <a:solidFill>
-            <a:srgbClr val="0F2040"/>
-          </a:solidFill>
-          <a:ln>
-            <a:noFill/>
-          </a:ln>
-          <a:effectLst/>
-        </p:spPr>
-        <p:style>
-          <a:lnRef idx="1">
-            <a:schemeClr val="accent1"/>
-          </a:lnRef>
-          <a:fillRef idx="3">
-            <a:schemeClr val="accent1"/>
-          </a:fillRef>
-          <a:effectRef idx="2">
-            <a:schemeClr val="accent1"/>
-          </a:effectRef>
-          <a:fontRef idx="minor">
-            <a:schemeClr val="lt1"/>
-          </a:fontRef>
-        </p:style>
-        <p:txBody>
-          <a:bodyPr rtlCol="0" anchor="ctr"/>
-          <a:lstStyle/>
-          <a:p>
-            <a:pPr algn="ctr"/>
-          </a:p>
-        </p:txBody>
-      </p:sp>
-      <p:sp>
-        <p:nvSpPr>
-          <p:cNvPr id="10" name="TextBox 9"/>
-          <p:cNvSpPr txBox="1"/>
-          <p:nvPr/>
-        </p:nvSpPr>
-        <p:spPr>
-          <a:xfrm>
-            <a:off x="365760" y="6583680"/>
-            <a:ext cx="6400800" cy="274320"/>
-          </a:xfrm>
-          <a:prstGeom prst="rect">
-            <a:avLst/>
-          </a:prstGeom>
-          <a:noFill/>
-        </p:spPr>
-        <p:txBody>
-          <a:bodyPr wrap="square" anchor="ctr" lIns="45720" rIns="45720">
-            <a:spAutoFit/>
-          </a:bodyPr>
-          <a:lstStyle/>
-          <a:p>
-            <a:pPr algn="l"/>
-            <a:r>
-              <a:rPr sz="900" b="0">
-                <a:solidFill>
-                  <a:srgbClr val="FFFFFF"/>
-                </a:solidFill>
-                <a:latin typeface="Calibri"/>
-              </a:rPr>
-              <a:t>Asesorías Integrales CyJ · Capacitación Personal</a:t>
-            </a:r>
-          </a:p>
-        </p:txBody>
-      </p:sp>
-      <p:sp>
-        <p:nvSpPr>
-          <p:cNvPr id="11" name="TextBox 10"/>
-          <p:cNvSpPr txBox="1"/>
-          <p:nvPr/>
-        </p:nvSpPr>
-        <p:spPr>
-          <a:xfrm>
-            <a:off x="7315200" y="6583680"/>
-            <a:ext cx="4572000" cy="274320"/>
-          </a:xfrm>
-          <a:prstGeom prst="rect">
-            <a:avLst/>
-          </a:prstGeom>
-          <a:noFill/>
-        </p:spPr>
-        <p:txBody>
-          <a:bodyPr wrap="square" anchor="ctr" lIns="45720" rIns="45720">
-            <a:spAutoFit/>
-          </a:bodyPr>
-          <a:lstStyle/>
-          <a:p>
-            <a:pPr algn="r"/>
-            <a:r>
-              <a:rPr sz="900" b="0">
-                <a:solidFill>
-                  <a:srgbClr val="F59E0B"/>
-                </a:solidFill>
-                <a:latin typeface="Calibri"/>
-              </a:rPr>
-              <a:t>https://condominios-cyj.vercel.app</a:t>
+              <a:t>asesoriasintegralescyj@gmail.com  ·  +56 964 650 643</a:t>
             </a:r>
           </a:p>
         </p:txBody>
